--- a/ML USUPERVISED PYTHON.pptx
+++ b/ML USUPERVISED PYTHON.pptx
@@ -5,7 +5,7 @@
     <p:sldMasterId id="2147483648" r:id="rId1"/>
   </p:sldMasterIdLst>
   <p:notesMasterIdLst>
-    <p:notesMasterId r:id="rId13"/>
+    <p:notesMasterId r:id="rId17"/>
   </p:notesMasterIdLst>
   <p:sldIdLst>
     <p:sldId id="256" r:id="rId2"/>
@@ -16,9 +16,13 @@
     <p:sldId id="259" r:id="rId7"/>
     <p:sldId id="260" r:id="rId8"/>
     <p:sldId id="261" r:id="rId9"/>
-    <p:sldId id="262" r:id="rId10"/>
-    <p:sldId id="263" r:id="rId11"/>
-    <p:sldId id="265" r:id="rId12"/>
+    <p:sldId id="267" r:id="rId10"/>
+    <p:sldId id="262" r:id="rId11"/>
+    <p:sldId id="263" r:id="rId12"/>
+    <p:sldId id="268" r:id="rId13"/>
+    <p:sldId id="265" r:id="rId14"/>
+    <p:sldId id="270" r:id="rId15"/>
+    <p:sldId id="269" r:id="rId16"/>
   </p:sldIdLst>
   <p:sldSz cx="12192000" cy="6858000"/>
   <p:notesSz cx="6858000" cy="9144000"/>
@@ -549,6 +553,90 @@
     <p:extLst>
       <p:ext uri="{BB962C8B-B14F-4D97-AF65-F5344CB8AC3E}">
         <p14:creationId xmlns:p14="http://schemas.microsoft.com/office/powerpoint/2010/main" val="3522970312"/>
+      </p:ext>
+    </p:extLst>
+  </p:cSld>
+  <p:clrMapOvr>
+    <a:masterClrMapping/>
+  </p:clrMapOvr>
+</p:notes>
+</file>
+
+<file path=ppt/notesSlides/notesSlide2.xml><?xml version="1.0" encoding="utf-8"?>
+<p:notes xmlns:a="http://schemas.openxmlformats.org/drawingml/2006/main" xmlns:r="http://schemas.openxmlformats.org/officeDocument/2006/relationships" xmlns:p="http://schemas.openxmlformats.org/presentationml/2006/main">
+  <p:cSld>
+    <p:spTree>
+      <p:nvGrpSpPr>
+        <p:cNvPr id="1" name=""/>
+        <p:cNvGrpSpPr/>
+        <p:nvPr/>
+      </p:nvGrpSpPr>
+      <p:grpSpPr>
+        <a:xfrm>
+          <a:off x="0" y="0"/>
+          <a:ext cx="0" cy="0"/>
+          <a:chOff x="0" y="0"/>
+          <a:chExt cx="0" cy="0"/>
+        </a:xfrm>
+      </p:grpSpPr>
+      <p:sp>
+        <p:nvSpPr>
+          <p:cNvPr id="2" name="Slide Image Placeholder 1"/>
+          <p:cNvSpPr>
+            <a:spLocks noGrp="1" noRot="1" noChangeAspect="1"/>
+          </p:cNvSpPr>
+          <p:nvPr>
+            <p:ph type="sldImg"/>
+          </p:nvPr>
+        </p:nvSpPr>
+        <p:spPr/>
+      </p:sp>
+      <p:sp>
+        <p:nvSpPr>
+          <p:cNvPr id="3" name="Notes Placeholder 2"/>
+          <p:cNvSpPr>
+            <a:spLocks noGrp="1"/>
+          </p:cNvSpPr>
+          <p:nvPr>
+            <p:ph type="body" idx="1"/>
+          </p:nvPr>
+        </p:nvSpPr>
+        <p:spPr/>
+        <p:txBody>
+          <a:bodyPr/>
+          <a:lstStyle/>
+          <a:p>
+            <a:endParaRPr lang="en-US" dirty="0"/>
+          </a:p>
+        </p:txBody>
+      </p:sp>
+      <p:sp>
+        <p:nvSpPr>
+          <p:cNvPr id="4" name="Slide Number Placeholder 3"/>
+          <p:cNvSpPr>
+            <a:spLocks noGrp="1"/>
+          </p:cNvSpPr>
+          <p:nvPr>
+            <p:ph type="sldNum" sz="quarter" idx="5"/>
+          </p:nvPr>
+        </p:nvSpPr>
+        <p:spPr/>
+        <p:txBody>
+          <a:bodyPr/>
+          <a:lstStyle/>
+          <a:p>
+            <a:fld id="{503DA738-1808-4A66-A7F0-540176B7FD15}" type="slidenum">
+              <a:rPr lang="en-US" smtClean="0"/>
+              <a:t>10</a:t>
+            </a:fld>
+            <a:endParaRPr lang="en-US"/>
+          </a:p>
+        </p:txBody>
+      </p:sp>
+    </p:spTree>
+    <p:extLst>
+      <p:ext uri="{BB962C8B-B14F-4D97-AF65-F5344CB8AC3E}">
+        <p14:creationId xmlns:p14="http://schemas.microsoft.com/office/powerpoint/2010/main" val="2284657410"/>
       </p:ext>
     </p:extLst>
   </p:cSld>
@@ -6238,8 +6326,8 @@
         </p:nvSpPr>
         <p:spPr>
           <a:xfrm>
-            <a:off x="3447738" y="1066801"/>
-            <a:ext cx="7712387" cy="3318930"/>
+            <a:off x="1633929" y="572126"/>
+            <a:ext cx="8686748" cy="3318930"/>
           </a:xfrm>
         </p:spPr>
         <p:txBody>
@@ -6248,6 +6336,7 @@
           </a:bodyPr>
           <a:lstStyle/>
           <a:p>
+            <a:pPr algn="ctr"/>
             <a:r>
               <a:rPr lang="en-US" sz="4400" b="1" dirty="0"/>
               <a:t>Unsupervised </a:t>
@@ -6306,7 +6395,7 @@
         </p:nvSpPr>
         <p:spPr>
           <a:xfrm>
-            <a:off x="3237874" y="5021705"/>
+            <a:off x="2181017" y="4636956"/>
             <a:ext cx="8139659" cy="1648918"/>
           </a:xfrm>
         </p:spPr>
@@ -6316,6 +6405,7 @@
           </a:bodyPr>
           <a:lstStyle/>
           <a:p>
+            <a:pPr algn="ctr"/>
             <a:r>
               <a:rPr lang="en-US" sz="2600" cap="none" dirty="0">
                 <a:latin typeface="Times New Roman" panose="02020603050405020304" pitchFamily="18" charset="0"/>
@@ -6404,7 +6494,7 @@
           <p:cNvPr id="2" name="Title 1">
             <a:extLst>
               <a:ext uri="{FF2B5EF4-FFF2-40B4-BE49-F238E27FC236}">
-                <a16:creationId xmlns:a16="http://schemas.microsoft.com/office/drawing/2014/main" id="{AA063DBA-0873-0582-D7AD-66A74B8E3CDA}"/>
+                <a16:creationId xmlns:a16="http://schemas.microsoft.com/office/drawing/2014/main" id="{69A7B1B4-18BE-1E3F-5389-99B4C9900703}"/>
               </a:ext>
             </a:extLst>
           </p:cNvPr>
@@ -6417,50 +6507,589 @@
         </p:nvSpPr>
         <p:spPr>
           <a:xfrm>
-            <a:off x="685801" y="224853"/>
-            <a:ext cx="10131425" cy="674558"/>
+            <a:off x="685801" y="149903"/>
+            <a:ext cx="10131425" cy="1199212"/>
           </a:xfrm>
         </p:spPr>
         <p:txBody>
-          <a:bodyPr/>
+          <a:bodyPr>
+            <a:noAutofit/>
+          </a:bodyPr>
           <a:lstStyle/>
           <a:p>
-            <a:r>
-              <a:rPr lang="en-US" cap="none" dirty="0"/>
-              <a:t>2.7a) Task 7: Clinical Interpretation</a:t>
-            </a:r>
-          </a:p>
-        </p:txBody>
-      </p:sp>
-      <p:sp>
-        <p:nvSpPr>
-          <p:cNvPr id="3" name="Content Placeholder 2">
+            <a:pPr algn="ctr"/>
+            <a:r>
+              <a:rPr lang="en-US" sz="4400" cap="none" dirty="0"/>
+              <a:t>2.6 Task 6: Reproducible Reporting</a:t>
+            </a:r>
+          </a:p>
+        </p:txBody>
+      </p:sp>
+      <p:sp>
+        <p:nvSpPr>
+          <p:cNvPr id="4" name="Rectangle 1">
             <a:extLst>
               <a:ext uri="{FF2B5EF4-FFF2-40B4-BE49-F238E27FC236}">
-                <a16:creationId xmlns:a16="http://schemas.microsoft.com/office/drawing/2014/main" id="{070F8F27-FF93-171B-03BC-D716AD416A55}"/>
+                <a16:creationId xmlns:a16="http://schemas.microsoft.com/office/drawing/2014/main" id="{135691D0-01D5-6C52-345B-F0969A499C65}"/>
               </a:ext>
             </a:extLst>
           </p:cNvPr>
           <p:cNvSpPr>
-            <a:spLocks noGrp="1"/>
+            <a:spLocks noGrp="1" noChangeArrowheads="1"/>
           </p:cNvSpPr>
           <p:nvPr>
             <p:ph idx="1"/>
           </p:nvPr>
         </p:nvSpPr>
-        <p:spPr/>
-        <p:txBody>
-          <a:bodyPr/>
+        <p:spPr bwMode="auto">
+          <a:xfrm>
+            <a:off x="5532623" y="1235572"/>
+            <a:ext cx="6131801" cy="5293757"/>
+          </a:xfrm>
+          <a:prstGeom prst="rect">
+            <a:avLst/>
+          </a:prstGeom>
+          <a:noFill/>
+          <a:ln>
+            <a:noFill/>
+          </a:ln>
+          <a:effectLst/>
+          <a:extLst>
+            <a:ext uri="{909E8E84-426E-40DD-AFC4-6F175D3DCCD1}">
+              <a14:hiddenFill xmlns:a14="http://schemas.microsoft.com/office/drawing/2010/main">
+                <a:solidFill>
+                  <a:schemeClr val="accent1"/>
+                </a:solidFill>
+              </a14:hiddenFill>
+            </a:ext>
+            <a:ext uri="{91240B29-F687-4F45-9708-019B960494DF}">
+              <a14:hiddenLine xmlns:a14="http://schemas.microsoft.com/office/drawing/2010/main" w="9525">
+                <a:solidFill>
+                  <a:schemeClr val="tx1"/>
+                </a:solidFill>
+                <a:miter lim="800000"/>
+                <a:headEnd/>
+                <a:tailEnd/>
+              </a14:hiddenLine>
+            </a:ext>
+            <a:ext uri="{AF507438-7753-43E0-B8FC-AC1667EBCBE1}">
+              <a14:hiddenEffects xmlns:a14="http://schemas.microsoft.com/office/drawing/2010/main">
+                <a:effectLst>
+                  <a:outerShdw dist="35921" dir="2700000" algn="ctr" rotWithShape="0">
+                    <a:schemeClr val="bg2"/>
+                  </a:outerShdw>
+                </a:effectLst>
+              </a14:hiddenEffects>
+            </a:ext>
+          </a:extLst>
+        </p:spPr>
+        <p:txBody>
+          <a:bodyPr vert="horz" wrap="square" lIns="91440" tIns="45720" rIns="91440" bIns="45720" numCol="1" anchor="ctr" anchorCtr="0" compatLnSpc="1">
+            <a:prstTxWarp prst="textNoShape">
+              <a:avLst/>
+            </a:prstTxWarp>
+            <a:spAutoFit/>
+          </a:bodyPr>
           <a:lstStyle/>
           <a:p>
-            <a:endParaRPr lang="en-US" dirty="0"/>
-          </a:p>
-        </p:txBody>
-      </p:sp>
+            <a:pPr marL="0" marR="0" lvl="0" indent="0" algn="l" defTabSz="914400" rtl="0" eaLnBrk="0" fontAlgn="base" latinLnBrk="0" hangingPunct="0">
+              <a:lnSpc>
+                <a:spcPct val="100000"/>
+              </a:lnSpc>
+              <a:spcBef>
+                <a:spcPct val="0"/>
+              </a:spcBef>
+              <a:spcAft>
+                <a:spcPct val="0"/>
+              </a:spcAft>
+              <a:buClrTx/>
+              <a:buSzTx/>
+              <a:buFontTx/>
+              <a:buNone/>
+              <a:tabLst/>
+            </a:pPr>
+            <a:endParaRPr kumimoji="0" lang="en-US" altLang="en-US" sz="1800" b="0" i="0" u="none" strike="noStrike" cap="none" normalizeH="0" baseline="0" dirty="0">
+              <a:ln>
+                <a:noFill/>
+              </a:ln>
+              <a:solidFill>
+                <a:schemeClr val="tx1"/>
+              </a:solidFill>
+              <a:effectLst/>
+              <a:latin typeface="Arial" panose="020B0604020202020204" pitchFamily="34" charset="0"/>
+            </a:endParaRPr>
+          </a:p>
+          <a:p>
+            <a:pPr marL="0" marR="0" lvl="0" indent="0" algn="l" defTabSz="914400" rtl="0" eaLnBrk="0" fontAlgn="base" latinLnBrk="0" hangingPunct="0">
+              <a:lnSpc>
+                <a:spcPct val="100000"/>
+              </a:lnSpc>
+              <a:spcBef>
+                <a:spcPct val="0"/>
+              </a:spcBef>
+              <a:spcAft>
+                <a:spcPct val="0"/>
+              </a:spcAft>
+              <a:buClrTx/>
+              <a:buSzTx/>
+              <a:buFontTx/>
+              <a:buChar char="•"/>
+              <a:tabLst/>
+            </a:pPr>
+            <a:r>
+              <a:rPr kumimoji="0" lang="en-US" altLang="en-US" sz="2000" b="0" i="0" u="none" strike="noStrike" cap="none" normalizeH="0" baseline="0" dirty="0">
+                <a:ln>
+                  <a:noFill/>
+                </a:ln>
+                <a:solidFill>
+                  <a:schemeClr val="tx1"/>
+                </a:solidFill>
+                <a:effectLst/>
+                <a:latin typeface="Lucida Sans Unicode" panose="020B0602030504020204" pitchFamily="34" charset="0"/>
+                <a:cs typeface="Lucida Sans Unicode" panose="020B0602030504020204" pitchFamily="34" charset="0"/>
+              </a:rPr>
+              <a:t>Analysis conducted in a structured </a:t>
+            </a:r>
+            <a:r>
+              <a:rPr kumimoji="0" lang="en-US" altLang="en-US" sz="2000" b="1" i="0" u="none" strike="noStrike" cap="none" normalizeH="0" baseline="0" dirty="0" err="1">
+                <a:ln>
+                  <a:noFill/>
+                </a:ln>
+                <a:solidFill>
+                  <a:schemeClr val="tx1"/>
+                </a:solidFill>
+                <a:effectLst/>
+                <a:latin typeface="Lucida Sans Unicode" panose="020B0602030504020204" pitchFamily="34" charset="0"/>
+                <a:cs typeface="Lucida Sans Unicode" panose="020B0602030504020204" pitchFamily="34" charset="0"/>
+              </a:rPr>
+              <a:t>Jupyter</a:t>
+            </a:r>
+            <a:r>
+              <a:rPr kumimoji="0" lang="en-US" altLang="en-US" sz="2000" b="1" i="0" u="none" strike="noStrike" cap="none" normalizeH="0" baseline="0" dirty="0">
+                <a:ln>
+                  <a:noFill/>
+                </a:ln>
+                <a:solidFill>
+                  <a:schemeClr val="tx1"/>
+                </a:solidFill>
+                <a:effectLst/>
+                <a:latin typeface="Lucida Sans Unicode" panose="020B0602030504020204" pitchFamily="34" charset="0"/>
+                <a:cs typeface="Lucida Sans Unicode" panose="020B0602030504020204" pitchFamily="34" charset="0"/>
+              </a:rPr>
+              <a:t> Notebook</a:t>
+            </a:r>
+            <a:r>
+              <a:rPr kumimoji="0" lang="en-US" altLang="en-US" sz="2000" b="0" i="0" u="none" strike="noStrike" cap="none" normalizeH="0" baseline="0" dirty="0">
+                <a:ln>
+                  <a:noFill/>
+                </a:ln>
+                <a:solidFill>
+                  <a:schemeClr val="tx1"/>
+                </a:solidFill>
+                <a:effectLst/>
+                <a:latin typeface="Lucida Sans Unicode" panose="020B0602030504020204" pitchFamily="34" charset="0"/>
+                <a:cs typeface="Lucida Sans Unicode" panose="020B0602030504020204" pitchFamily="34" charset="0"/>
+              </a:rPr>
+              <a:t> </a:t>
+            </a:r>
+          </a:p>
+          <a:p>
+            <a:pPr marL="0" marR="0" lvl="0" indent="0" algn="l" defTabSz="914400" rtl="0" eaLnBrk="0" fontAlgn="base" latinLnBrk="0" hangingPunct="0">
+              <a:lnSpc>
+                <a:spcPct val="100000"/>
+              </a:lnSpc>
+              <a:spcBef>
+                <a:spcPct val="0"/>
+              </a:spcBef>
+              <a:spcAft>
+                <a:spcPct val="0"/>
+              </a:spcAft>
+              <a:buClrTx/>
+              <a:buSzTx/>
+              <a:buFontTx/>
+              <a:buChar char="•"/>
+              <a:tabLst/>
+            </a:pPr>
+            <a:endParaRPr kumimoji="0" lang="en-US" altLang="en-US" sz="2000" b="0" i="0" u="none" strike="noStrike" cap="none" normalizeH="0" baseline="0" dirty="0">
+              <a:ln>
+                <a:noFill/>
+              </a:ln>
+              <a:solidFill>
+                <a:schemeClr val="tx1"/>
+              </a:solidFill>
+              <a:effectLst/>
+              <a:latin typeface="Lucida Sans Unicode" panose="020B0602030504020204" pitchFamily="34" charset="0"/>
+              <a:cs typeface="Lucida Sans Unicode" panose="020B0602030504020204" pitchFamily="34" charset="0"/>
+            </a:endParaRPr>
+          </a:p>
+          <a:p>
+            <a:pPr marL="0" marR="0" lvl="0" indent="0" algn="l" defTabSz="914400" rtl="0" eaLnBrk="0" fontAlgn="base" latinLnBrk="0" hangingPunct="0">
+              <a:lnSpc>
+                <a:spcPct val="100000"/>
+              </a:lnSpc>
+              <a:spcBef>
+                <a:spcPct val="0"/>
+              </a:spcBef>
+              <a:spcAft>
+                <a:spcPct val="0"/>
+              </a:spcAft>
+              <a:buClrTx/>
+              <a:buSzTx/>
+              <a:buFontTx/>
+              <a:buChar char="•"/>
+              <a:tabLst/>
+            </a:pPr>
+            <a:r>
+              <a:rPr kumimoji="0" lang="en-US" altLang="en-US" sz="2000" b="0" i="0" u="none" strike="noStrike" cap="none" normalizeH="0" baseline="0" dirty="0">
+                <a:ln>
+                  <a:noFill/>
+                </a:ln>
+                <a:solidFill>
+                  <a:schemeClr val="tx1"/>
+                </a:solidFill>
+                <a:effectLst/>
+                <a:latin typeface="Lucida Sans Unicode" panose="020B0602030504020204" pitchFamily="34" charset="0"/>
+                <a:cs typeface="Lucida Sans Unicode" panose="020B0602030504020204" pitchFamily="34" charset="0"/>
+              </a:rPr>
+              <a:t>Clear workflow from data import → preprocessing → PCA → clustering </a:t>
+            </a:r>
+          </a:p>
+          <a:p>
+            <a:pPr marL="0" marR="0" lvl="0" indent="0" algn="l" defTabSz="914400" rtl="0" eaLnBrk="0" fontAlgn="base" latinLnBrk="0" hangingPunct="0">
+              <a:lnSpc>
+                <a:spcPct val="100000"/>
+              </a:lnSpc>
+              <a:spcBef>
+                <a:spcPct val="0"/>
+              </a:spcBef>
+              <a:spcAft>
+                <a:spcPct val="0"/>
+              </a:spcAft>
+              <a:buClrTx/>
+              <a:buSzTx/>
+              <a:buFontTx/>
+              <a:buChar char="•"/>
+              <a:tabLst/>
+            </a:pPr>
+            <a:endParaRPr kumimoji="0" lang="en-US" altLang="en-US" sz="2000" b="0" i="0" u="none" strike="noStrike" cap="none" normalizeH="0" baseline="0" dirty="0">
+              <a:ln>
+                <a:noFill/>
+              </a:ln>
+              <a:solidFill>
+                <a:schemeClr val="tx1"/>
+              </a:solidFill>
+              <a:effectLst/>
+              <a:latin typeface="Lucida Sans Unicode" panose="020B0602030504020204" pitchFamily="34" charset="0"/>
+              <a:cs typeface="Lucida Sans Unicode" panose="020B0602030504020204" pitchFamily="34" charset="0"/>
+            </a:endParaRPr>
+          </a:p>
+          <a:p>
+            <a:pPr marL="0" marR="0" lvl="0" indent="0" algn="l" defTabSz="914400" rtl="0" eaLnBrk="0" fontAlgn="base" latinLnBrk="0" hangingPunct="0">
+              <a:lnSpc>
+                <a:spcPct val="100000"/>
+              </a:lnSpc>
+              <a:spcBef>
+                <a:spcPct val="0"/>
+              </a:spcBef>
+              <a:spcAft>
+                <a:spcPct val="0"/>
+              </a:spcAft>
+              <a:buClrTx/>
+              <a:buSzTx/>
+              <a:buFontTx/>
+              <a:buChar char="•"/>
+              <a:tabLst/>
+            </a:pPr>
+            <a:r>
+              <a:rPr kumimoji="0" lang="en-US" altLang="en-US" sz="2000" b="0" i="0" u="none" strike="noStrike" cap="none" normalizeH="0" baseline="0" dirty="0">
+                <a:ln>
+                  <a:noFill/>
+                </a:ln>
+                <a:solidFill>
+                  <a:schemeClr val="tx1"/>
+                </a:solidFill>
+                <a:effectLst/>
+                <a:latin typeface="Lucida Sans Unicode" panose="020B0602030504020204" pitchFamily="34" charset="0"/>
+                <a:cs typeface="Lucida Sans Unicode" panose="020B0602030504020204" pitchFamily="34" charset="0"/>
+              </a:rPr>
+              <a:t>All steps documented with code, outputs, and explanations </a:t>
+            </a:r>
+          </a:p>
+          <a:p>
+            <a:pPr marL="0" marR="0" lvl="0" indent="0" algn="l" defTabSz="914400" rtl="0" eaLnBrk="0" fontAlgn="base" latinLnBrk="0" hangingPunct="0">
+              <a:lnSpc>
+                <a:spcPct val="100000"/>
+              </a:lnSpc>
+              <a:spcBef>
+                <a:spcPct val="0"/>
+              </a:spcBef>
+              <a:spcAft>
+                <a:spcPct val="0"/>
+              </a:spcAft>
+              <a:buClrTx/>
+              <a:buSzTx/>
+              <a:buFontTx/>
+              <a:buChar char="•"/>
+              <a:tabLst/>
+            </a:pPr>
+            <a:endParaRPr kumimoji="0" lang="en-US" altLang="en-US" sz="2000" b="0" i="0" u="none" strike="noStrike" cap="none" normalizeH="0" baseline="0" dirty="0">
+              <a:ln>
+                <a:noFill/>
+              </a:ln>
+              <a:solidFill>
+                <a:schemeClr val="tx1"/>
+              </a:solidFill>
+              <a:effectLst/>
+              <a:latin typeface="Lucida Sans Unicode" panose="020B0602030504020204" pitchFamily="34" charset="0"/>
+              <a:cs typeface="Lucida Sans Unicode" panose="020B0602030504020204" pitchFamily="34" charset="0"/>
+            </a:endParaRPr>
+          </a:p>
+          <a:p>
+            <a:pPr marL="0" marR="0" lvl="0" indent="0" algn="l" defTabSz="914400" rtl="0" eaLnBrk="0" fontAlgn="base" latinLnBrk="0" hangingPunct="0">
+              <a:lnSpc>
+                <a:spcPct val="100000"/>
+              </a:lnSpc>
+              <a:spcBef>
+                <a:spcPct val="0"/>
+              </a:spcBef>
+              <a:spcAft>
+                <a:spcPct val="0"/>
+              </a:spcAft>
+              <a:buClrTx/>
+              <a:buSzTx/>
+              <a:buFontTx/>
+              <a:buChar char="•"/>
+              <a:tabLst/>
+            </a:pPr>
+            <a:r>
+              <a:rPr kumimoji="0" lang="en-US" altLang="en-US" sz="2000" b="0" i="0" u="none" strike="noStrike" cap="none" normalizeH="0" baseline="0" dirty="0">
+                <a:ln>
+                  <a:noFill/>
+                </a:ln>
+                <a:solidFill>
+                  <a:schemeClr val="tx1"/>
+                </a:solidFill>
+                <a:effectLst/>
+                <a:latin typeface="Lucida Sans Unicode" panose="020B0602030504020204" pitchFamily="34" charset="0"/>
+                <a:cs typeface="Lucida Sans Unicode" panose="020B0602030504020204" pitchFamily="34" charset="0"/>
+              </a:rPr>
+              <a:t>Results are </a:t>
+            </a:r>
+            <a:r>
+              <a:rPr kumimoji="0" lang="en-US" altLang="en-US" sz="2000" b="1" i="0" u="none" strike="noStrike" cap="none" normalizeH="0" baseline="0" dirty="0">
+                <a:ln>
+                  <a:noFill/>
+                </a:ln>
+                <a:solidFill>
+                  <a:schemeClr val="tx1"/>
+                </a:solidFill>
+                <a:effectLst/>
+                <a:latin typeface="Lucida Sans Unicode" panose="020B0602030504020204" pitchFamily="34" charset="0"/>
+                <a:cs typeface="Lucida Sans Unicode" panose="020B0602030504020204" pitchFamily="34" charset="0"/>
+              </a:rPr>
+              <a:t>fully reproducible</a:t>
+            </a:r>
+            <a:r>
+              <a:rPr kumimoji="0" lang="en-US" altLang="en-US" sz="2000" b="0" i="0" u="none" strike="noStrike" cap="none" normalizeH="0" baseline="0" dirty="0">
+                <a:ln>
+                  <a:noFill/>
+                </a:ln>
+                <a:solidFill>
+                  <a:schemeClr val="tx1"/>
+                </a:solidFill>
+                <a:effectLst/>
+                <a:latin typeface="Lucida Sans Unicode" panose="020B0602030504020204" pitchFamily="34" charset="0"/>
+                <a:cs typeface="Lucida Sans Unicode" panose="020B0602030504020204" pitchFamily="34" charset="0"/>
+              </a:rPr>
+              <a:t> </a:t>
+            </a:r>
+          </a:p>
+          <a:p>
+            <a:pPr marL="0" marR="0" lvl="0" indent="0" algn="l" defTabSz="914400" rtl="0" eaLnBrk="0" fontAlgn="base" latinLnBrk="0" hangingPunct="0">
+              <a:lnSpc>
+                <a:spcPct val="100000"/>
+              </a:lnSpc>
+              <a:spcBef>
+                <a:spcPct val="0"/>
+              </a:spcBef>
+              <a:spcAft>
+                <a:spcPct val="0"/>
+              </a:spcAft>
+              <a:buClrTx/>
+              <a:buSzTx/>
+              <a:buFontTx/>
+              <a:buChar char="•"/>
+              <a:tabLst/>
+            </a:pPr>
+            <a:endParaRPr kumimoji="0" lang="en-US" altLang="en-US" sz="2000" b="0" i="0" u="none" strike="noStrike" cap="none" normalizeH="0" baseline="0" dirty="0">
+              <a:ln>
+                <a:noFill/>
+              </a:ln>
+              <a:solidFill>
+                <a:schemeClr val="tx1"/>
+              </a:solidFill>
+              <a:effectLst/>
+              <a:latin typeface="Lucida Sans Unicode" panose="020B0602030504020204" pitchFamily="34" charset="0"/>
+              <a:cs typeface="Lucida Sans Unicode" panose="020B0602030504020204" pitchFamily="34" charset="0"/>
+            </a:endParaRPr>
+          </a:p>
+          <a:p>
+            <a:pPr marL="0" marR="0" lvl="0" indent="0" algn="l" defTabSz="914400" rtl="0" eaLnBrk="0" fontAlgn="base" latinLnBrk="0" hangingPunct="0">
+              <a:lnSpc>
+                <a:spcPct val="100000"/>
+              </a:lnSpc>
+              <a:spcBef>
+                <a:spcPct val="0"/>
+              </a:spcBef>
+              <a:spcAft>
+                <a:spcPct val="0"/>
+              </a:spcAft>
+              <a:buClrTx/>
+              <a:buSzTx/>
+              <a:buFontTx/>
+              <a:buChar char="•"/>
+              <a:tabLst/>
+            </a:pPr>
+            <a:r>
+              <a:rPr kumimoji="0" lang="en-US" altLang="en-US" sz="2000" b="0" i="0" u="none" strike="noStrike" cap="none" normalizeH="0" baseline="0" dirty="0">
+                <a:ln>
+                  <a:noFill/>
+                </a:ln>
+                <a:solidFill>
+                  <a:schemeClr val="tx1"/>
+                </a:solidFill>
+                <a:effectLst/>
+                <a:latin typeface="Lucida Sans Unicode" panose="020B0602030504020204" pitchFamily="34" charset="0"/>
+                <a:cs typeface="Lucida Sans Unicode" panose="020B0602030504020204" pitchFamily="34" charset="0"/>
+              </a:rPr>
+              <a:t>Consistent preprocessing applied across all stages </a:t>
+            </a:r>
+          </a:p>
+          <a:p>
+            <a:pPr marL="0" marR="0" lvl="0" indent="0" algn="l" defTabSz="914400" rtl="0" eaLnBrk="0" fontAlgn="base" latinLnBrk="0" hangingPunct="0">
+              <a:lnSpc>
+                <a:spcPct val="100000"/>
+              </a:lnSpc>
+              <a:spcBef>
+                <a:spcPct val="0"/>
+              </a:spcBef>
+              <a:spcAft>
+                <a:spcPct val="0"/>
+              </a:spcAft>
+              <a:buClrTx/>
+              <a:buSzTx/>
+              <a:buFontTx/>
+              <a:buChar char="•"/>
+              <a:tabLst/>
+            </a:pPr>
+            <a:endParaRPr kumimoji="0" lang="en-US" altLang="en-US" sz="2000" b="0" i="0" u="none" strike="noStrike" cap="none" normalizeH="0" baseline="0" dirty="0">
+              <a:ln>
+                <a:noFill/>
+              </a:ln>
+              <a:solidFill>
+                <a:schemeClr val="tx1"/>
+              </a:solidFill>
+              <a:effectLst/>
+              <a:latin typeface="Lucida Sans Unicode" panose="020B0602030504020204" pitchFamily="34" charset="0"/>
+              <a:cs typeface="Lucida Sans Unicode" panose="020B0602030504020204" pitchFamily="34" charset="0"/>
+            </a:endParaRPr>
+          </a:p>
+          <a:p>
+            <a:pPr marL="0" marR="0" lvl="0" indent="0" algn="l" defTabSz="914400" rtl="0" eaLnBrk="0" fontAlgn="base" latinLnBrk="0" hangingPunct="0">
+              <a:lnSpc>
+                <a:spcPct val="100000"/>
+              </a:lnSpc>
+              <a:spcBef>
+                <a:spcPct val="0"/>
+              </a:spcBef>
+              <a:spcAft>
+                <a:spcPct val="0"/>
+              </a:spcAft>
+              <a:buClrTx/>
+              <a:buSzTx/>
+              <a:buFontTx/>
+              <a:buChar char="•"/>
+              <a:tabLst/>
+            </a:pPr>
+            <a:r>
+              <a:rPr kumimoji="0" lang="en-US" altLang="en-US" sz="2000" b="0" i="0" u="none" strike="noStrike" cap="none" normalizeH="0" baseline="0" dirty="0">
+                <a:ln>
+                  <a:noFill/>
+                </a:ln>
+                <a:solidFill>
+                  <a:schemeClr val="tx1"/>
+                </a:solidFill>
+                <a:effectLst/>
+                <a:latin typeface="Lucida Sans Unicode" panose="020B0602030504020204" pitchFamily="34" charset="0"/>
+                <a:cs typeface="Lucida Sans Unicode" panose="020B0602030504020204" pitchFamily="34" charset="0"/>
+              </a:rPr>
+              <a:t>Libraries used: pandas, </a:t>
+            </a:r>
+            <a:r>
+              <a:rPr kumimoji="0" lang="en-US" altLang="en-US" sz="2000" b="0" i="0" u="none" strike="noStrike" cap="none" normalizeH="0" baseline="0" dirty="0" err="1">
+                <a:ln>
+                  <a:noFill/>
+                </a:ln>
+                <a:solidFill>
+                  <a:schemeClr val="tx1"/>
+                </a:solidFill>
+                <a:effectLst/>
+                <a:latin typeface="Lucida Sans Unicode" panose="020B0602030504020204" pitchFamily="34" charset="0"/>
+                <a:cs typeface="Lucida Sans Unicode" panose="020B0602030504020204" pitchFamily="34" charset="0"/>
+              </a:rPr>
+              <a:t>numpy</a:t>
+            </a:r>
+            <a:r>
+              <a:rPr kumimoji="0" lang="en-US" altLang="en-US" sz="2000" b="0" i="0" u="none" strike="noStrike" cap="none" normalizeH="0" baseline="0" dirty="0">
+                <a:ln>
+                  <a:noFill/>
+                </a:ln>
+                <a:solidFill>
+                  <a:schemeClr val="tx1"/>
+                </a:solidFill>
+                <a:effectLst/>
+                <a:latin typeface="Lucida Sans Unicode" panose="020B0602030504020204" pitchFamily="34" charset="0"/>
+                <a:cs typeface="Lucida Sans Unicode" panose="020B0602030504020204" pitchFamily="34" charset="0"/>
+              </a:rPr>
+              <a:t>, matplotlib, seaborn, scikit-learn </a:t>
+            </a:r>
+          </a:p>
+        </p:txBody>
+      </p:sp>
+      <p:pic>
+        <p:nvPicPr>
+          <p:cNvPr id="8" name="Picture 7">
+            <a:extLst>
+              <a:ext uri="{FF2B5EF4-FFF2-40B4-BE49-F238E27FC236}">
+                <a16:creationId xmlns:a16="http://schemas.microsoft.com/office/drawing/2014/main" id="{9B85E060-2534-701B-7318-3ECBD227BEA2}"/>
+              </a:ext>
+            </a:extLst>
+          </p:cNvPr>
+          <p:cNvPicPr>
+            <a:picLocks noChangeAspect="1"/>
+          </p:cNvPicPr>
+          <p:nvPr/>
+        </p:nvPicPr>
+        <p:blipFill>
+          <a:blip r:embed="rId3"/>
+          <a:stretch>
+            <a:fillRect/>
+          </a:stretch>
+        </p:blipFill>
+        <p:spPr>
+          <a:xfrm>
+            <a:off x="389744" y="1349114"/>
+            <a:ext cx="4846822" cy="5066675"/>
+          </a:xfrm>
+          <a:prstGeom prst="rect">
+            <a:avLst/>
+          </a:prstGeom>
+        </p:spPr>
+      </p:pic>
     </p:spTree>
     <p:extLst>
       <p:ext uri="{BB962C8B-B14F-4D97-AF65-F5344CB8AC3E}">
-        <p14:creationId xmlns:p14="http://schemas.microsoft.com/office/powerpoint/2010/main" val="921673643"/>
+        <p14:creationId xmlns:p14="http://schemas.microsoft.com/office/powerpoint/2010/main" val="3223621411"/>
       </p:ext>
     </p:extLst>
   </p:cSld>
@@ -6492,6 +7121,542 @@
           <p:cNvPr id="2" name="Title 1">
             <a:extLst>
               <a:ext uri="{FF2B5EF4-FFF2-40B4-BE49-F238E27FC236}">
+                <a16:creationId xmlns:a16="http://schemas.microsoft.com/office/drawing/2014/main" id="{AA063DBA-0873-0582-D7AD-66A74B8E3CDA}"/>
+              </a:ext>
+            </a:extLst>
+          </p:cNvPr>
+          <p:cNvSpPr>
+            <a:spLocks noGrp="1"/>
+          </p:cNvSpPr>
+          <p:nvPr>
+            <p:ph type="title"/>
+          </p:nvPr>
+        </p:nvSpPr>
+        <p:spPr>
+          <a:xfrm>
+            <a:off x="685801" y="224853"/>
+            <a:ext cx="10131425" cy="674558"/>
+          </a:xfrm>
+        </p:spPr>
+        <p:txBody>
+          <a:bodyPr/>
+          <a:lstStyle/>
+          <a:p>
+            <a:pPr algn="ctr"/>
+            <a:r>
+              <a:rPr lang="en-US" b="1" cap="none" dirty="0"/>
+              <a:t>2.7a) Task 7: Clinical Interpretation</a:t>
+            </a:r>
+          </a:p>
+        </p:txBody>
+      </p:sp>
+      <p:sp>
+        <p:nvSpPr>
+          <p:cNvPr id="3" name="Content Placeholder 2">
+            <a:extLst>
+              <a:ext uri="{FF2B5EF4-FFF2-40B4-BE49-F238E27FC236}">
+                <a16:creationId xmlns:a16="http://schemas.microsoft.com/office/drawing/2014/main" id="{070F8F27-FF93-171B-03BC-D716AD416A55}"/>
+              </a:ext>
+            </a:extLst>
+          </p:cNvPr>
+          <p:cNvSpPr>
+            <a:spLocks noGrp="1"/>
+          </p:cNvSpPr>
+          <p:nvPr>
+            <p:ph idx="1"/>
+          </p:nvPr>
+        </p:nvSpPr>
+        <p:spPr>
+          <a:xfrm>
+            <a:off x="685801" y="1304143"/>
+            <a:ext cx="10131425" cy="4976735"/>
+          </a:xfrm>
+        </p:spPr>
+        <p:txBody>
+          <a:bodyPr>
+            <a:normAutofit fontScale="92500"/>
+          </a:bodyPr>
+          <a:lstStyle/>
+          <a:p>
+            <a:r>
+              <a:rPr lang="en-US" sz="2200" dirty="0">
+                <a:latin typeface="Lucida Sans Unicode" panose="020B0602030504020204" pitchFamily="34" charset="0"/>
+                <a:cs typeface="Lucida Sans Unicode" panose="020B0602030504020204" pitchFamily="34" charset="0"/>
+              </a:rPr>
+              <a:t>3 clinically meaningful patient subgroups  were identified by this unsupervised machine learning assignment.</a:t>
+            </a:r>
+          </a:p>
+          <a:p>
+            <a:r>
+              <a:rPr lang="en-US" sz="2200" dirty="0">
+                <a:latin typeface="Lucida Sans Unicode" panose="020B0602030504020204" pitchFamily="34" charset="0"/>
+                <a:cs typeface="Lucida Sans Unicode" panose="020B0602030504020204" pitchFamily="34" charset="0"/>
+              </a:rPr>
+              <a:t> The first cluster represents a low-risk population, characterized by younger individuals with normal BMI and healthy lipid and glucose profiles. </a:t>
+            </a:r>
+          </a:p>
+          <a:p>
+            <a:r>
+              <a:rPr lang="en-US" sz="2200" dirty="0">
+                <a:latin typeface="Lucida Sans Unicode" panose="020B0602030504020204" pitchFamily="34" charset="0"/>
+                <a:cs typeface="Lucida Sans Unicode" panose="020B0602030504020204" pitchFamily="34" charset="0"/>
+              </a:rPr>
+              <a:t>The second cluster reflects a metabolic syndrome phenotype, with elevated waist circumference, triglycerides, and fasting glucose, indicating increased risk of diabetes and cardiovascular disease. </a:t>
+            </a:r>
+          </a:p>
+          <a:p>
+            <a:r>
+              <a:rPr lang="en-US" sz="2200" dirty="0">
+                <a:latin typeface="Lucida Sans Unicode" panose="020B0602030504020204" pitchFamily="34" charset="0"/>
+                <a:cs typeface="Lucida Sans Unicode" panose="020B0602030504020204" pitchFamily="34" charset="0"/>
+              </a:rPr>
+              <a:t>The third cluster represents a high cardiovascular risk group, composed of older patients with hypertension, elevated LDL cholesterol, and increased inflammatory markers such as CRP.</a:t>
+            </a:r>
+          </a:p>
+          <a:p>
+            <a:r>
+              <a:rPr lang="en-US" sz="2200" dirty="0">
+                <a:latin typeface="Lucida Sans Unicode" panose="020B0602030504020204" pitchFamily="34" charset="0"/>
+                <a:cs typeface="Lucida Sans Unicode" panose="020B0602030504020204" pitchFamily="34" charset="0"/>
+              </a:rPr>
+              <a:t>These findings demonstrate that unsupervised learning can uncover hidden patterns in cardiometabolic data, enabling early identification of at-risk individuals and supporting targeted prevention strategies in clinical practice.</a:t>
+            </a:r>
+          </a:p>
+          <a:p>
+            <a:endParaRPr lang="en-US" dirty="0"/>
+          </a:p>
+        </p:txBody>
+      </p:sp>
+    </p:spTree>
+    <p:extLst>
+      <p:ext uri="{BB962C8B-B14F-4D97-AF65-F5344CB8AC3E}">
+        <p14:creationId xmlns:p14="http://schemas.microsoft.com/office/powerpoint/2010/main" val="921673643"/>
+      </p:ext>
+    </p:extLst>
+  </p:cSld>
+  <p:clrMapOvr>
+    <a:masterClrMapping/>
+  </p:clrMapOvr>
+</p:sld>
+</file>
+
+<file path=ppt/slides/slide12.xml><?xml version="1.0" encoding="utf-8"?>
+<p:sld xmlns:a="http://schemas.openxmlformats.org/drawingml/2006/main" xmlns:r="http://schemas.openxmlformats.org/officeDocument/2006/relationships" xmlns:p="http://schemas.openxmlformats.org/presentationml/2006/main">
+  <p:cSld>
+    <p:spTree>
+      <p:nvGrpSpPr>
+        <p:cNvPr id="1" name=""/>
+        <p:cNvGrpSpPr/>
+        <p:nvPr/>
+      </p:nvGrpSpPr>
+      <p:grpSpPr>
+        <a:xfrm>
+          <a:off x="0" y="0"/>
+          <a:ext cx="0" cy="0"/>
+          <a:chOff x="0" y="0"/>
+          <a:chExt cx="0" cy="0"/>
+        </a:xfrm>
+      </p:grpSpPr>
+      <p:sp>
+        <p:nvSpPr>
+          <p:cNvPr id="2" name="Title 1">
+            <a:extLst>
+              <a:ext uri="{FF2B5EF4-FFF2-40B4-BE49-F238E27FC236}">
+                <a16:creationId xmlns:a16="http://schemas.microsoft.com/office/drawing/2014/main" id="{98A85720-15A2-514D-F443-7A5CDAF35DB1}"/>
+              </a:ext>
+            </a:extLst>
+          </p:cNvPr>
+          <p:cNvSpPr>
+            <a:spLocks noGrp="1"/>
+          </p:cNvSpPr>
+          <p:nvPr>
+            <p:ph type="title"/>
+          </p:nvPr>
+        </p:nvSpPr>
+        <p:spPr>
+          <a:xfrm>
+            <a:off x="685801" y="47747"/>
+            <a:ext cx="10131425" cy="866654"/>
+          </a:xfrm>
+        </p:spPr>
+        <p:txBody>
+          <a:bodyPr/>
+          <a:lstStyle/>
+          <a:p>
+            <a:r>
+              <a:rPr lang="en-US" b="1" cap="none" dirty="0"/>
+              <a:t>2.7a) Task 7: Clinical Interpretation Visualization</a:t>
+            </a:r>
+            <a:endParaRPr lang="en-US" dirty="0"/>
+          </a:p>
+        </p:txBody>
+      </p:sp>
+      <p:graphicFrame>
+        <p:nvGraphicFramePr>
+          <p:cNvPr id="14" name="Content Placeholder 13">
+            <a:extLst>
+              <a:ext uri="{FF2B5EF4-FFF2-40B4-BE49-F238E27FC236}">
+                <a16:creationId xmlns:a16="http://schemas.microsoft.com/office/drawing/2014/main" id="{BB4FE14C-90A5-8BCC-BB79-2B155D68077C}"/>
+              </a:ext>
+            </a:extLst>
+          </p:cNvPr>
+          <p:cNvGraphicFramePr>
+            <a:graphicFrameLocks noGrp="1"/>
+          </p:cNvGraphicFramePr>
+          <p:nvPr>
+            <p:ph idx="1"/>
+            <p:extLst>
+              <p:ext uri="{D42A27DB-BD31-4B8C-83A1-F6EECF244321}">
+                <p14:modId xmlns:p14="http://schemas.microsoft.com/office/powerpoint/2010/main" val="2626397081"/>
+              </p:ext>
+            </p:extLst>
+          </p:nvPr>
+        </p:nvGraphicFramePr>
+        <p:xfrm>
+          <a:off x="794479" y="5326894"/>
+          <a:ext cx="10577380" cy="1483360"/>
+        </p:xfrm>
+        <a:graphic>
+          <a:graphicData uri="http://schemas.openxmlformats.org/drawingml/2006/table">
+            <a:tbl>
+              <a:tblPr firstRow="1" bandRow="1">
+                <a:tableStyleId>{5C22544A-7EE6-4342-B048-85BDC9FD1C3A}</a:tableStyleId>
+              </a:tblPr>
+              <a:tblGrid>
+                <a:gridCol w="2644345">
+                  <a:extLst>
+                    <a:ext uri="{9D8B030D-6E8A-4147-A177-3AD203B41FA5}">
+                      <a16:colId xmlns:a16="http://schemas.microsoft.com/office/drawing/2014/main" val="4240154009"/>
+                    </a:ext>
+                  </a:extLst>
+                </a:gridCol>
+                <a:gridCol w="2644345">
+                  <a:extLst>
+                    <a:ext uri="{9D8B030D-6E8A-4147-A177-3AD203B41FA5}">
+                      <a16:colId xmlns:a16="http://schemas.microsoft.com/office/drawing/2014/main" val="1072378813"/>
+                    </a:ext>
+                  </a:extLst>
+                </a:gridCol>
+                <a:gridCol w="2644345">
+                  <a:extLst>
+                    <a:ext uri="{9D8B030D-6E8A-4147-A177-3AD203B41FA5}">
+                      <a16:colId xmlns:a16="http://schemas.microsoft.com/office/drawing/2014/main" val="3665370307"/>
+                    </a:ext>
+                  </a:extLst>
+                </a:gridCol>
+                <a:gridCol w="2644345">
+                  <a:extLst>
+                    <a:ext uri="{9D8B030D-6E8A-4147-A177-3AD203B41FA5}">
+                      <a16:colId xmlns:a16="http://schemas.microsoft.com/office/drawing/2014/main" val="2947833196"/>
+                    </a:ext>
+                  </a:extLst>
+                </a:gridCol>
+              </a:tblGrid>
+              <a:tr h="370840">
+                <a:tc>
+                  <a:txBody>
+                    <a:bodyPr/>
+                    <a:lstStyle/>
+                    <a:p>
+                      <a:r>
+                        <a:rPr lang="en-US" dirty="0"/>
+                        <a:t>Feature</a:t>
+                      </a:r>
+                    </a:p>
+                  </a:txBody>
+                  <a:tcPr/>
+                </a:tc>
+                <a:tc>
+                  <a:txBody>
+                    <a:bodyPr/>
+                    <a:lstStyle/>
+                    <a:p>
+                      <a:r>
+                        <a:rPr lang="en-US" dirty="0"/>
+                        <a:t>Cluster 1</a:t>
+                      </a:r>
+                    </a:p>
+                  </a:txBody>
+                  <a:tcPr/>
+                </a:tc>
+                <a:tc>
+                  <a:txBody>
+                    <a:bodyPr/>
+                    <a:lstStyle/>
+                    <a:p>
+                      <a:r>
+                        <a:rPr lang="en-US" dirty="0"/>
+                        <a:t>Cluster 2</a:t>
+                      </a:r>
+                    </a:p>
+                  </a:txBody>
+                  <a:tcPr/>
+                </a:tc>
+                <a:tc>
+                  <a:txBody>
+                    <a:bodyPr/>
+                    <a:lstStyle/>
+                    <a:p>
+                      <a:r>
+                        <a:rPr lang="en-US" dirty="0"/>
+                        <a:t>Cluster 3</a:t>
+                      </a:r>
+                    </a:p>
+                  </a:txBody>
+                  <a:tcPr/>
+                </a:tc>
+                <a:extLst>
+                  <a:ext uri="{0D108BD9-81ED-4DB2-BD59-A6C34878D82A}">
+                    <a16:rowId xmlns:a16="http://schemas.microsoft.com/office/drawing/2014/main" val="4106224608"/>
+                  </a:ext>
+                </a:extLst>
+              </a:tr>
+              <a:tr h="370840">
+                <a:tc>
+                  <a:txBody>
+                    <a:bodyPr/>
+                    <a:lstStyle/>
+                    <a:p>
+                      <a:r>
+                        <a:rPr lang="en-US" dirty="0"/>
+                        <a:t>BMI</a:t>
+                      </a:r>
+                    </a:p>
+                  </a:txBody>
+                  <a:tcPr/>
+                </a:tc>
+                <a:tc>
+                  <a:txBody>
+                    <a:bodyPr/>
+                    <a:lstStyle/>
+                    <a:p>
+                      <a:r>
+                        <a:rPr lang="en-US" dirty="0"/>
+                        <a:t>LOW</a:t>
+                      </a:r>
+                    </a:p>
+                  </a:txBody>
+                  <a:tcPr/>
+                </a:tc>
+                <a:tc>
+                  <a:txBody>
+                    <a:bodyPr/>
+                    <a:lstStyle/>
+                    <a:p>
+                      <a:r>
+                        <a:rPr lang="en-US" dirty="0"/>
+                        <a:t>HIGH</a:t>
+                      </a:r>
+                    </a:p>
+                  </a:txBody>
+                  <a:tcPr/>
+                </a:tc>
+                <a:tc>
+                  <a:txBody>
+                    <a:bodyPr/>
+                    <a:lstStyle/>
+                    <a:p>
+                      <a:r>
+                        <a:rPr lang="en-US" dirty="0"/>
+                        <a:t>MEDIUM </a:t>
+                      </a:r>
+                    </a:p>
+                  </a:txBody>
+                  <a:tcPr/>
+                </a:tc>
+                <a:extLst>
+                  <a:ext uri="{0D108BD9-81ED-4DB2-BD59-A6C34878D82A}">
+                    <a16:rowId xmlns:a16="http://schemas.microsoft.com/office/drawing/2014/main" val="571313467"/>
+                  </a:ext>
+                </a:extLst>
+              </a:tr>
+              <a:tr h="370840">
+                <a:tc>
+                  <a:txBody>
+                    <a:bodyPr/>
+                    <a:lstStyle/>
+                    <a:p>
+                      <a:r>
+                        <a:rPr lang="en-US" dirty="0"/>
+                        <a:t>GLUCOSE</a:t>
+                      </a:r>
+                    </a:p>
+                  </a:txBody>
+                  <a:tcPr/>
+                </a:tc>
+                <a:tc>
+                  <a:txBody>
+                    <a:bodyPr/>
+                    <a:lstStyle/>
+                    <a:p>
+                      <a:r>
+                        <a:rPr lang="en-US" dirty="0"/>
+                        <a:t>NORMAL </a:t>
+                      </a:r>
+                    </a:p>
+                  </a:txBody>
+                  <a:tcPr/>
+                </a:tc>
+                <a:tc>
+                  <a:txBody>
+                    <a:bodyPr/>
+                    <a:lstStyle/>
+                    <a:p>
+                      <a:r>
+                        <a:rPr lang="en-US" dirty="0"/>
+                        <a:t>HIGH</a:t>
+                      </a:r>
+                    </a:p>
+                  </a:txBody>
+                  <a:tcPr/>
+                </a:tc>
+                <a:tc>
+                  <a:txBody>
+                    <a:bodyPr/>
+                    <a:lstStyle/>
+                    <a:p>
+                      <a:r>
+                        <a:rPr lang="en-US" dirty="0"/>
+                        <a:t>HIGH</a:t>
+                      </a:r>
+                    </a:p>
+                  </a:txBody>
+                  <a:tcPr/>
+                </a:tc>
+                <a:extLst>
+                  <a:ext uri="{0D108BD9-81ED-4DB2-BD59-A6C34878D82A}">
+                    <a16:rowId xmlns:a16="http://schemas.microsoft.com/office/drawing/2014/main" val="2393165550"/>
+                  </a:ext>
+                </a:extLst>
+              </a:tr>
+              <a:tr h="370840">
+                <a:tc>
+                  <a:txBody>
+                    <a:bodyPr/>
+                    <a:lstStyle/>
+                    <a:p>
+                      <a:r>
+                        <a:rPr lang="en-US" dirty="0"/>
+                        <a:t>LDL</a:t>
+                      </a:r>
+                    </a:p>
+                  </a:txBody>
+                  <a:tcPr/>
+                </a:tc>
+                <a:tc>
+                  <a:txBody>
+                    <a:bodyPr/>
+                    <a:lstStyle/>
+                    <a:p>
+                      <a:r>
+                        <a:rPr lang="en-US" dirty="0"/>
+                        <a:t>NORMAL</a:t>
+                      </a:r>
+                    </a:p>
+                  </a:txBody>
+                  <a:tcPr/>
+                </a:tc>
+                <a:tc>
+                  <a:txBody>
+                    <a:bodyPr/>
+                    <a:lstStyle/>
+                    <a:p>
+                      <a:r>
+                        <a:rPr lang="en-US" dirty="0"/>
+                        <a:t>MEDIUM</a:t>
+                      </a:r>
+                    </a:p>
+                  </a:txBody>
+                  <a:tcPr/>
+                </a:tc>
+                <a:tc>
+                  <a:txBody>
+                    <a:bodyPr/>
+                    <a:lstStyle/>
+                    <a:p>
+                      <a:r>
+                        <a:rPr lang="en-US" dirty="0"/>
+                        <a:t>HIGH</a:t>
+                      </a:r>
+                    </a:p>
+                  </a:txBody>
+                  <a:tcPr/>
+                </a:tc>
+                <a:extLst>
+                  <a:ext uri="{0D108BD9-81ED-4DB2-BD59-A6C34878D82A}">
+                    <a16:rowId xmlns:a16="http://schemas.microsoft.com/office/drawing/2014/main" val="3013202410"/>
+                  </a:ext>
+                </a:extLst>
+              </a:tr>
+            </a:tbl>
+          </a:graphicData>
+        </a:graphic>
+      </p:graphicFrame>
+      <p:pic>
+        <p:nvPicPr>
+          <p:cNvPr id="16" name="Picture 15">
+            <a:extLst>
+              <a:ext uri="{FF2B5EF4-FFF2-40B4-BE49-F238E27FC236}">
+                <a16:creationId xmlns:a16="http://schemas.microsoft.com/office/drawing/2014/main" id="{6DCEE83B-6989-F6A6-9E6E-20D8F79A00D5}"/>
+              </a:ext>
+            </a:extLst>
+          </p:cNvPr>
+          <p:cNvPicPr>
+            <a:picLocks noChangeAspect="1"/>
+          </p:cNvPicPr>
+          <p:nvPr/>
+        </p:nvPicPr>
+        <p:blipFill>
+          <a:blip r:embed="rId2"/>
+          <a:stretch>
+            <a:fillRect/>
+          </a:stretch>
+        </p:blipFill>
+        <p:spPr>
+          <a:xfrm>
+            <a:off x="2563318" y="914401"/>
+            <a:ext cx="6460761" cy="4227225"/>
+          </a:xfrm>
+          <a:prstGeom prst="rect">
+            <a:avLst/>
+          </a:prstGeom>
+        </p:spPr>
+      </p:pic>
+    </p:spTree>
+    <p:extLst>
+      <p:ext uri="{BB962C8B-B14F-4D97-AF65-F5344CB8AC3E}">
+        <p14:creationId xmlns:p14="http://schemas.microsoft.com/office/powerpoint/2010/main" val="4218926286"/>
+      </p:ext>
+    </p:extLst>
+  </p:cSld>
+  <p:clrMapOvr>
+    <a:masterClrMapping/>
+  </p:clrMapOvr>
+</p:sld>
+</file>
+
+<file path=ppt/slides/slide13.xml><?xml version="1.0" encoding="utf-8"?>
+<p:sld xmlns:a="http://schemas.openxmlformats.org/drawingml/2006/main" xmlns:r="http://schemas.openxmlformats.org/officeDocument/2006/relationships" xmlns:p="http://schemas.openxmlformats.org/presentationml/2006/main">
+  <p:cSld>
+    <p:spTree>
+      <p:nvGrpSpPr>
+        <p:cNvPr id="1" name=""/>
+        <p:cNvGrpSpPr/>
+        <p:nvPr/>
+      </p:nvGrpSpPr>
+      <p:grpSpPr>
+        <a:xfrm>
+          <a:off x="0" y="0"/>
+          <a:ext cx="0" cy="0"/>
+          <a:chOff x="0" y="0"/>
+          <a:chExt cx="0" cy="0"/>
+        </a:xfrm>
+      </p:grpSpPr>
+      <p:sp>
+        <p:nvSpPr>
+          <p:cNvPr id="2" name="Title 1">
+            <a:extLst>
+              <a:ext uri="{FF2B5EF4-FFF2-40B4-BE49-F238E27FC236}">
                 <a16:creationId xmlns:a16="http://schemas.microsoft.com/office/drawing/2014/main" id="{9FB14ECB-1351-6567-E458-EB7AEE514482}"/>
               </a:ext>
             </a:extLst>
@@ -6525,25 +7690,247 @@
       </p:sp>
       <p:sp>
         <p:nvSpPr>
-          <p:cNvPr id="3" name="Content Placeholder 2">
+          <p:cNvPr id="6" name="TextBox 5">
             <a:extLst>
               <a:ext uri="{FF2B5EF4-FFF2-40B4-BE49-F238E27FC236}">
-                <a16:creationId xmlns:a16="http://schemas.microsoft.com/office/drawing/2014/main" id="{73C936B6-8228-2A9F-E3BE-5386D7688109}"/>
+                <a16:creationId xmlns:a16="http://schemas.microsoft.com/office/drawing/2014/main" id="{C85B3E46-97EA-515D-9307-9B88B1582AD6}"/>
               </a:ext>
             </a:extLst>
           </p:cNvPr>
-          <p:cNvSpPr>
-            <a:spLocks noGrp="1"/>
-          </p:cNvSpPr>
-          <p:nvPr>
-            <p:ph idx="1"/>
-          </p:nvPr>
-        </p:nvSpPr>
-        <p:spPr/>
-        <p:txBody>
-          <a:bodyPr/>
+          <p:cNvSpPr txBox="1"/>
+          <p:nvPr/>
+        </p:nvSpPr>
+        <p:spPr>
+          <a:xfrm>
+            <a:off x="685801" y="944142"/>
+            <a:ext cx="10751694" cy="5632311"/>
+          </a:xfrm>
+          <a:prstGeom prst="rect">
+            <a:avLst/>
+          </a:prstGeom>
+          <a:noFill/>
+        </p:spPr>
+        <p:txBody>
+          <a:bodyPr wrap="square">
+            <a:spAutoFit/>
+          </a:bodyPr>
           <a:lstStyle/>
           <a:p>
+            <a:pPr marL="285750" indent="-285750">
+              <a:buFont typeface="Wingdings" panose="05000000000000000000" pitchFamily="2" charset="2"/>
+              <a:buChar char="ü"/>
+            </a:pPr>
+            <a:r>
+              <a:rPr lang="en-US" b="1" dirty="0">
+                <a:latin typeface="Lucida Sans Unicode" panose="020B0602030504020204" pitchFamily="34" charset="0"/>
+                <a:cs typeface="Lucida Sans Unicode" panose="020B0602030504020204" pitchFamily="34" charset="0"/>
+              </a:rPr>
+              <a:t>K-means assumptions</a:t>
+            </a:r>
+            <a:r>
+              <a:rPr lang="en-US" dirty="0">
+                <a:latin typeface="Lucida Sans Unicode" panose="020B0602030504020204" pitchFamily="34" charset="0"/>
+                <a:cs typeface="Lucida Sans Unicode" panose="020B0602030504020204" pitchFamily="34" charset="0"/>
+              </a:rPr>
+              <a:t> -assumes clusters are spherical and of similar size but Real patient data is rarely perfectly shaped ,Some groups may overlap or be irregular.</a:t>
+            </a:r>
+          </a:p>
+          <a:p>
+            <a:pPr marL="285750" indent="-285750">
+              <a:buFont typeface="Wingdings" panose="05000000000000000000" pitchFamily="2" charset="2"/>
+              <a:buChar char="ü"/>
+            </a:pPr>
+            <a:endParaRPr lang="en-US" dirty="0">
+              <a:latin typeface="Lucida Sans Unicode" panose="020B0602030504020204" pitchFamily="34" charset="0"/>
+              <a:cs typeface="Lucida Sans Unicode" panose="020B0602030504020204" pitchFamily="34" charset="0"/>
+            </a:endParaRPr>
+          </a:p>
+          <a:p>
+            <a:pPr marL="285750" indent="-285750">
+              <a:buFont typeface="Wingdings" panose="05000000000000000000" pitchFamily="2" charset="2"/>
+              <a:buChar char="ü"/>
+            </a:pPr>
+            <a:r>
+              <a:rPr lang="en-US" b="1" dirty="0">
+                <a:latin typeface="Lucida Sans Unicode" panose="020B0602030504020204" pitchFamily="34" charset="0"/>
+                <a:cs typeface="Lucida Sans Unicode" panose="020B0602030504020204" pitchFamily="34" charset="0"/>
+              </a:rPr>
+              <a:t>PCA linearity limitation</a:t>
+            </a:r>
+            <a:r>
+              <a:rPr lang="en-US" dirty="0">
+                <a:latin typeface="Lucida Sans Unicode" panose="020B0602030504020204" pitchFamily="34" charset="0"/>
+                <a:cs typeface="Lucida Sans Unicode" panose="020B0602030504020204" pitchFamily="34" charset="0"/>
+              </a:rPr>
+              <a:t> -captures only linear relationships between variables but health data often has nonlinear interactions thus important nonlinear patterns may not be captured.</a:t>
+            </a:r>
+          </a:p>
+          <a:p>
+            <a:pPr marL="285750" indent="-285750">
+              <a:buFont typeface="Wingdings" panose="05000000000000000000" pitchFamily="2" charset="2"/>
+              <a:buChar char="ü"/>
+            </a:pPr>
+            <a:endParaRPr lang="en-US" dirty="0">
+              <a:latin typeface="Lucida Sans Unicode" panose="020B0602030504020204" pitchFamily="34" charset="0"/>
+              <a:cs typeface="Lucida Sans Unicode" panose="020B0602030504020204" pitchFamily="34" charset="0"/>
+            </a:endParaRPr>
+          </a:p>
+          <a:p>
+            <a:pPr marL="285750" indent="-285750">
+              <a:buFont typeface="Wingdings" panose="05000000000000000000" pitchFamily="2" charset="2"/>
+              <a:buChar char="ü"/>
+            </a:pPr>
+            <a:r>
+              <a:rPr lang="en-US" b="1" dirty="0">
+                <a:latin typeface="Lucida Sans Unicode" panose="020B0602030504020204" pitchFamily="34" charset="0"/>
+                <a:cs typeface="Lucida Sans Unicode" panose="020B0602030504020204" pitchFamily="34" charset="0"/>
+              </a:rPr>
+              <a:t>Moderate cluster separation</a:t>
+            </a:r>
+            <a:r>
+              <a:rPr lang="en-US" dirty="0">
+                <a:latin typeface="Lucida Sans Unicode" panose="020B0602030504020204" pitchFamily="34" charset="0"/>
+                <a:cs typeface="Lucida Sans Unicode" panose="020B0602030504020204" pitchFamily="34" charset="0"/>
+              </a:rPr>
+              <a:t> -Silhouette score = 0.42, Clusters are </a:t>
+            </a:r>
+            <a:r>
+              <a:rPr lang="en-US" b="1" dirty="0">
+                <a:latin typeface="Lucida Sans Unicode" panose="020B0602030504020204" pitchFamily="34" charset="0"/>
+                <a:cs typeface="Lucida Sans Unicode" panose="020B0602030504020204" pitchFamily="34" charset="0"/>
+              </a:rPr>
+              <a:t>not perfectly distinct</a:t>
+            </a:r>
+            <a:r>
+              <a:rPr lang="en-US" dirty="0">
+                <a:latin typeface="Lucida Sans Unicode" panose="020B0602030504020204" pitchFamily="34" charset="0"/>
+                <a:cs typeface="Lucida Sans Unicode" panose="020B0602030504020204" pitchFamily="34" charset="0"/>
+              </a:rPr>
+              <a:t> , Some patients lie between groups; This reflects real-world overlap in patient risk profiles.</a:t>
+            </a:r>
+          </a:p>
+          <a:p>
+            <a:pPr marL="285750" indent="-285750">
+              <a:buFont typeface="Wingdings" panose="05000000000000000000" pitchFamily="2" charset="2"/>
+              <a:buChar char="ü"/>
+            </a:pPr>
+            <a:endParaRPr lang="en-US" dirty="0">
+              <a:latin typeface="Lucida Sans Unicode" panose="020B0602030504020204" pitchFamily="34" charset="0"/>
+              <a:cs typeface="Lucida Sans Unicode" panose="020B0602030504020204" pitchFamily="34" charset="0"/>
+            </a:endParaRPr>
+          </a:p>
+          <a:p>
+            <a:pPr marL="285750" indent="-285750">
+              <a:buFont typeface="Wingdings" panose="05000000000000000000" pitchFamily="2" charset="2"/>
+              <a:buChar char="ü"/>
+            </a:pPr>
+            <a:r>
+              <a:rPr lang="en-US" b="1" dirty="0">
+                <a:latin typeface="Lucida Sans Unicode" panose="020B0602030504020204" pitchFamily="34" charset="0"/>
+                <a:cs typeface="Lucida Sans Unicode" panose="020B0602030504020204" pitchFamily="34" charset="0"/>
+              </a:rPr>
+              <a:t>Small sample size-</a:t>
+            </a:r>
+            <a:r>
+              <a:rPr lang="en-US" dirty="0">
+                <a:latin typeface="Lucida Sans Unicode" panose="020B0602030504020204" pitchFamily="34" charset="0"/>
+                <a:cs typeface="Lucida Sans Unicode" panose="020B0602030504020204" pitchFamily="34" charset="0"/>
+              </a:rPr>
+              <a:t> Only 220 patients (202 after cleaning) Limits generalizability the results May not represent broader population thus Larger datasets may be  needed to confirm findings.</a:t>
+            </a:r>
+          </a:p>
+          <a:p>
+            <a:pPr marL="285750" indent="-285750">
+              <a:buFont typeface="Wingdings" panose="05000000000000000000" pitchFamily="2" charset="2"/>
+              <a:buChar char="ü"/>
+            </a:pPr>
+            <a:endParaRPr lang="en-US" dirty="0">
+              <a:latin typeface="Lucida Sans Unicode" panose="020B0602030504020204" pitchFamily="34" charset="0"/>
+              <a:cs typeface="Lucida Sans Unicode" panose="020B0602030504020204" pitchFamily="34" charset="0"/>
+            </a:endParaRPr>
+          </a:p>
+          <a:p>
+            <a:pPr marL="285750" indent="-285750">
+              <a:buFont typeface="Wingdings" panose="05000000000000000000" pitchFamily="2" charset="2"/>
+              <a:buChar char="ü"/>
+            </a:pPr>
+            <a:r>
+              <a:rPr lang="en-US" b="1" dirty="0">
+                <a:latin typeface="Lucida Sans Unicode" panose="020B0602030504020204" pitchFamily="34" charset="0"/>
+                <a:cs typeface="Lucida Sans Unicode" panose="020B0602030504020204" pitchFamily="34" charset="0"/>
+              </a:rPr>
+              <a:t>Data quality &amp; measurement variability</a:t>
+            </a:r>
+            <a:r>
+              <a:rPr lang="en-US" dirty="0">
+                <a:latin typeface="Lucida Sans Unicode" panose="020B0602030504020204" pitchFamily="34" charset="0"/>
+                <a:cs typeface="Lucida Sans Unicode" panose="020B0602030504020204" pitchFamily="34" charset="0"/>
+              </a:rPr>
+              <a:t> -Clinical measurements can vary, Lab values (CRP, glucose) fluctuate </a:t>
+            </a:r>
+          </a:p>
+          <a:p>
+            <a:pPr marL="285750" indent="-285750">
+              <a:buFont typeface="Wingdings" panose="05000000000000000000" pitchFamily="2" charset="2"/>
+              <a:buChar char="ü"/>
+            </a:pPr>
+            <a:r>
+              <a:rPr lang="en-US" dirty="0">
+                <a:latin typeface="Lucida Sans Unicode" panose="020B0602030504020204" pitchFamily="34" charset="0"/>
+                <a:cs typeface="Lucida Sans Unicode" panose="020B0602030504020204" pitchFamily="34" charset="0"/>
+              </a:rPr>
+              <a:t>Lifestyle variables may be self-</a:t>
+            </a:r>
+            <a:r>
+              <a:rPr lang="en-US" dirty="0" err="1">
+                <a:latin typeface="Lucida Sans Unicode" panose="020B0602030504020204" pitchFamily="34" charset="0"/>
+                <a:cs typeface="Lucida Sans Unicode" panose="020B0602030504020204" pitchFamily="34" charset="0"/>
+              </a:rPr>
+              <a:t>reported,This</a:t>
+            </a:r>
+            <a:r>
+              <a:rPr lang="en-US" dirty="0">
+                <a:latin typeface="Lucida Sans Unicode" panose="020B0602030504020204" pitchFamily="34" charset="0"/>
+                <a:cs typeface="Lucida Sans Unicode" panose="020B0602030504020204" pitchFamily="34" charset="0"/>
+              </a:rPr>
+              <a:t> may introduce noise into clustering.</a:t>
+            </a:r>
+          </a:p>
+          <a:p>
+            <a:pPr marL="285750" indent="-285750">
+              <a:buFont typeface="Wingdings" panose="05000000000000000000" pitchFamily="2" charset="2"/>
+              <a:buChar char="ü"/>
+            </a:pPr>
+            <a:endParaRPr lang="en-US" dirty="0">
+              <a:latin typeface="Lucida Sans Unicode" panose="020B0602030504020204" pitchFamily="34" charset="0"/>
+              <a:cs typeface="Lucida Sans Unicode" panose="020B0602030504020204" pitchFamily="34" charset="0"/>
+            </a:endParaRPr>
+          </a:p>
+          <a:p>
+            <a:pPr marL="285750" indent="-285750">
+              <a:buFont typeface="Wingdings" panose="05000000000000000000" pitchFamily="2" charset="2"/>
+              <a:buChar char="ü"/>
+            </a:pPr>
+            <a:r>
+              <a:rPr lang="en-US" b="1" dirty="0">
+                <a:latin typeface="Lucida Sans Unicode" panose="020B0602030504020204" pitchFamily="34" charset="0"/>
+                <a:cs typeface="Lucida Sans Unicode" panose="020B0602030504020204" pitchFamily="34" charset="0"/>
+              </a:rPr>
+              <a:t>Lack of external validation</a:t>
+            </a:r>
+            <a:r>
+              <a:rPr lang="en-US" dirty="0">
+                <a:latin typeface="Lucida Sans Unicode" panose="020B0602030504020204" pitchFamily="34" charset="0"/>
+                <a:cs typeface="Lucida Sans Unicode" panose="020B0602030504020204" pitchFamily="34" charset="0"/>
+              </a:rPr>
+              <a:t> No independent dataset used, Results only tested internally , External validation is required before clinical application.”</a:t>
+            </a:r>
+          </a:p>
+          <a:p>
+            <a:pPr>
+              <a:buFont typeface="Arial" panose="020B0604020202020204" pitchFamily="34" charset="0"/>
+              <a:buChar char="•"/>
+            </a:pPr>
             <a:endParaRPr lang="en-US" dirty="0"/>
           </a:p>
         </p:txBody>
@@ -6552,6 +7939,705 @@
     <p:extLst>
       <p:ext uri="{BB962C8B-B14F-4D97-AF65-F5344CB8AC3E}">
         <p14:creationId xmlns:p14="http://schemas.microsoft.com/office/powerpoint/2010/main" val="4214206458"/>
+      </p:ext>
+    </p:extLst>
+  </p:cSld>
+  <p:clrMapOvr>
+    <a:masterClrMapping/>
+  </p:clrMapOvr>
+</p:sld>
+</file>
+
+<file path=ppt/slides/slide14.xml><?xml version="1.0" encoding="utf-8"?>
+<p:sld xmlns:a="http://schemas.openxmlformats.org/drawingml/2006/main" xmlns:r="http://schemas.openxmlformats.org/officeDocument/2006/relationships" xmlns:p="http://schemas.openxmlformats.org/presentationml/2006/main">
+  <p:cSld>
+    <p:spTree>
+      <p:nvGrpSpPr>
+        <p:cNvPr id="1" name=""/>
+        <p:cNvGrpSpPr/>
+        <p:nvPr/>
+      </p:nvGrpSpPr>
+      <p:grpSpPr>
+        <a:xfrm>
+          <a:off x="0" y="0"/>
+          <a:ext cx="0" cy="0"/>
+          <a:chOff x="0" y="0"/>
+          <a:chExt cx="0" cy="0"/>
+        </a:xfrm>
+      </p:grpSpPr>
+      <p:sp>
+        <p:nvSpPr>
+          <p:cNvPr id="2" name="Title 1">
+            <a:extLst>
+              <a:ext uri="{FF2B5EF4-FFF2-40B4-BE49-F238E27FC236}">
+                <a16:creationId xmlns:a16="http://schemas.microsoft.com/office/drawing/2014/main" id="{460A47DF-8559-7EC8-0BE4-D7DF50838D07}"/>
+              </a:ext>
+            </a:extLst>
+          </p:cNvPr>
+          <p:cNvSpPr>
+            <a:spLocks noGrp="1"/>
+          </p:cNvSpPr>
+          <p:nvPr>
+            <p:ph type="title"/>
+          </p:nvPr>
+        </p:nvSpPr>
+        <p:spPr>
+          <a:xfrm>
+            <a:off x="685801" y="389745"/>
+            <a:ext cx="10131425" cy="1109272"/>
+          </a:xfrm>
+        </p:spPr>
+        <p:txBody>
+          <a:bodyPr>
+            <a:normAutofit/>
+          </a:bodyPr>
+          <a:lstStyle/>
+          <a:p>
+            <a:pPr algn="ctr"/>
+            <a:r>
+              <a:rPr lang="en-US" sz="4000" cap="none" dirty="0"/>
+              <a:t>Recommendations </a:t>
+            </a:r>
+          </a:p>
+        </p:txBody>
+      </p:sp>
+      <p:sp>
+        <p:nvSpPr>
+          <p:cNvPr id="5" name="Rectangle 2">
+            <a:extLst>
+              <a:ext uri="{FF2B5EF4-FFF2-40B4-BE49-F238E27FC236}">
+                <a16:creationId xmlns:a16="http://schemas.microsoft.com/office/drawing/2014/main" id="{A82B1C0F-DAA8-647A-4EB3-AA4FAC3260B0}"/>
+              </a:ext>
+            </a:extLst>
+          </p:cNvPr>
+          <p:cNvSpPr>
+            <a:spLocks noGrp="1" noChangeArrowheads="1"/>
+          </p:cNvSpPr>
+          <p:nvPr>
+            <p:ph idx="1"/>
+          </p:nvPr>
+        </p:nvSpPr>
+        <p:spPr bwMode="auto">
+          <a:xfrm>
+            <a:off x="940634" y="1499017"/>
+            <a:ext cx="7866256" cy="3447098"/>
+          </a:xfrm>
+          <a:prstGeom prst="rect">
+            <a:avLst/>
+          </a:prstGeom>
+          <a:noFill/>
+          <a:ln>
+            <a:noFill/>
+          </a:ln>
+          <a:effectLst/>
+          <a:extLst>
+            <a:ext uri="{909E8E84-426E-40DD-AFC4-6F175D3DCCD1}">
+              <a14:hiddenFill xmlns:a14="http://schemas.microsoft.com/office/drawing/2010/main">
+                <a:solidFill>
+                  <a:schemeClr val="accent1"/>
+                </a:solidFill>
+              </a14:hiddenFill>
+            </a:ext>
+            <a:ext uri="{91240B29-F687-4F45-9708-019B960494DF}">
+              <a14:hiddenLine xmlns:a14="http://schemas.microsoft.com/office/drawing/2010/main" w="9525">
+                <a:solidFill>
+                  <a:schemeClr val="tx1"/>
+                </a:solidFill>
+                <a:miter lim="800000"/>
+                <a:headEnd/>
+                <a:tailEnd/>
+              </a14:hiddenLine>
+            </a:ext>
+            <a:ext uri="{AF507438-7753-43E0-B8FC-AC1667EBCBE1}">
+              <a14:hiddenEffects xmlns:a14="http://schemas.microsoft.com/office/drawing/2010/main">
+                <a:effectLst>
+                  <a:outerShdw dist="35921" dir="2700000" algn="ctr" rotWithShape="0">
+                    <a:schemeClr val="bg2"/>
+                  </a:outerShdw>
+                </a:effectLst>
+              </a14:hiddenEffects>
+            </a:ext>
+          </a:extLst>
+        </p:spPr>
+        <p:txBody>
+          <a:bodyPr vert="horz" wrap="none" lIns="91440" tIns="45720" rIns="91440" bIns="45720" numCol="1" anchor="ctr" anchorCtr="0" compatLnSpc="1">
+            <a:prstTxWarp prst="textNoShape">
+              <a:avLst/>
+            </a:prstTxWarp>
+            <a:spAutoFit/>
+          </a:bodyPr>
+          <a:lstStyle/>
+          <a:p>
+            <a:pPr marL="0" marR="0" lvl="0" indent="0" algn="l" defTabSz="914400" rtl="0" eaLnBrk="0" fontAlgn="base" latinLnBrk="0" hangingPunct="0">
+              <a:lnSpc>
+                <a:spcPct val="100000"/>
+              </a:lnSpc>
+              <a:spcBef>
+                <a:spcPct val="0"/>
+              </a:spcBef>
+              <a:spcAft>
+                <a:spcPct val="0"/>
+              </a:spcAft>
+              <a:buClrTx/>
+              <a:buSzTx/>
+              <a:buFontTx/>
+              <a:buNone/>
+              <a:tabLst/>
+            </a:pPr>
+            <a:endParaRPr kumimoji="0" lang="en-US" altLang="en-US" sz="1800" b="0" i="0" u="none" strike="noStrike" cap="none" normalizeH="0" baseline="0" dirty="0">
+              <a:ln>
+                <a:noFill/>
+              </a:ln>
+              <a:solidFill>
+                <a:schemeClr val="tx1"/>
+              </a:solidFill>
+              <a:effectLst/>
+              <a:latin typeface="Arial" panose="020B0604020202020204" pitchFamily="34" charset="0"/>
+            </a:endParaRPr>
+          </a:p>
+          <a:p>
+            <a:pPr marL="0" marR="0" lvl="0" indent="0" algn="l" defTabSz="914400" rtl="0" eaLnBrk="0" fontAlgn="base" latinLnBrk="0" hangingPunct="0">
+              <a:lnSpc>
+                <a:spcPct val="100000"/>
+              </a:lnSpc>
+              <a:spcBef>
+                <a:spcPct val="0"/>
+              </a:spcBef>
+              <a:spcAft>
+                <a:spcPct val="0"/>
+              </a:spcAft>
+              <a:buClrTx/>
+              <a:buSzTx/>
+              <a:buFontTx/>
+              <a:buChar char="•"/>
+              <a:tabLst/>
+            </a:pPr>
+            <a:r>
+              <a:rPr kumimoji="0" lang="en-US" altLang="en-US" sz="2000" b="0" i="0" u="none" strike="noStrike" cap="none" normalizeH="0" baseline="0" dirty="0">
+                <a:ln>
+                  <a:noFill/>
+                </a:ln>
+                <a:solidFill>
+                  <a:schemeClr val="tx1"/>
+                </a:solidFill>
+                <a:effectLst/>
+                <a:latin typeface="Lucida Sans Unicode" panose="020B0602030504020204" pitchFamily="34" charset="0"/>
+                <a:cs typeface="Lucida Sans Unicode" panose="020B0602030504020204" pitchFamily="34" charset="0"/>
+              </a:rPr>
+              <a:t>Target high-risk clusters for </a:t>
+            </a:r>
+            <a:r>
+              <a:rPr kumimoji="0" lang="en-US" altLang="en-US" sz="2000" b="1" i="0" u="none" strike="noStrike" cap="none" normalizeH="0" baseline="0" dirty="0">
+                <a:ln>
+                  <a:noFill/>
+                </a:ln>
+                <a:solidFill>
+                  <a:schemeClr val="tx1"/>
+                </a:solidFill>
+                <a:effectLst/>
+                <a:latin typeface="Lucida Sans Unicode" panose="020B0602030504020204" pitchFamily="34" charset="0"/>
+                <a:cs typeface="Lucida Sans Unicode" panose="020B0602030504020204" pitchFamily="34" charset="0"/>
+              </a:rPr>
+              <a:t>early intervention &amp; monitoring</a:t>
+            </a:r>
+          </a:p>
+          <a:p>
+            <a:pPr marL="0" marR="0" lvl="0" indent="0" algn="l" defTabSz="914400" rtl="0" eaLnBrk="0" fontAlgn="base" latinLnBrk="0" hangingPunct="0">
+              <a:lnSpc>
+                <a:spcPct val="100000"/>
+              </a:lnSpc>
+              <a:spcBef>
+                <a:spcPct val="0"/>
+              </a:spcBef>
+              <a:spcAft>
+                <a:spcPct val="0"/>
+              </a:spcAft>
+              <a:buClrTx/>
+              <a:buSzTx/>
+              <a:buNone/>
+              <a:tabLst/>
+            </a:pPr>
+            <a:r>
+              <a:rPr kumimoji="0" lang="en-US" altLang="en-US" sz="2000" b="0" i="0" u="none" strike="noStrike" cap="none" normalizeH="0" baseline="0" dirty="0">
+                <a:ln>
+                  <a:noFill/>
+                </a:ln>
+                <a:solidFill>
+                  <a:schemeClr val="tx1"/>
+                </a:solidFill>
+                <a:effectLst/>
+                <a:latin typeface="Lucida Sans Unicode" panose="020B0602030504020204" pitchFamily="34" charset="0"/>
+                <a:cs typeface="Lucida Sans Unicode" panose="020B0602030504020204" pitchFamily="34" charset="0"/>
+              </a:rPr>
+              <a:t> </a:t>
+            </a:r>
+          </a:p>
+          <a:p>
+            <a:pPr marL="0" marR="0" lvl="0" indent="0" algn="l" defTabSz="914400" rtl="0" eaLnBrk="0" fontAlgn="base" latinLnBrk="0" hangingPunct="0">
+              <a:lnSpc>
+                <a:spcPct val="100000"/>
+              </a:lnSpc>
+              <a:spcBef>
+                <a:spcPct val="0"/>
+              </a:spcBef>
+              <a:spcAft>
+                <a:spcPct val="0"/>
+              </a:spcAft>
+              <a:buClrTx/>
+              <a:buSzTx/>
+              <a:buFontTx/>
+              <a:buChar char="•"/>
+              <a:tabLst/>
+            </a:pPr>
+            <a:r>
+              <a:rPr kumimoji="0" lang="en-US" altLang="en-US" sz="2000" b="0" i="0" u="none" strike="noStrike" cap="none" normalizeH="0" baseline="0" dirty="0">
+                <a:ln>
+                  <a:noFill/>
+                </a:ln>
+                <a:solidFill>
+                  <a:schemeClr val="tx1"/>
+                </a:solidFill>
+                <a:effectLst/>
+                <a:latin typeface="Lucida Sans Unicode" panose="020B0602030504020204" pitchFamily="34" charset="0"/>
+                <a:cs typeface="Lucida Sans Unicode" panose="020B0602030504020204" pitchFamily="34" charset="0"/>
+              </a:rPr>
+              <a:t>Use clustering to support </a:t>
+            </a:r>
+            <a:r>
+              <a:rPr kumimoji="0" lang="en-US" altLang="en-US" sz="2000" b="1" i="0" u="none" strike="noStrike" cap="none" normalizeH="0" baseline="0" dirty="0">
+                <a:ln>
+                  <a:noFill/>
+                </a:ln>
+                <a:solidFill>
+                  <a:schemeClr val="tx1"/>
+                </a:solidFill>
+                <a:effectLst/>
+                <a:latin typeface="Lucida Sans Unicode" panose="020B0602030504020204" pitchFamily="34" charset="0"/>
+                <a:cs typeface="Lucida Sans Unicode" panose="020B0602030504020204" pitchFamily="34" charset="0"/>
+              </a:rPr>
+              <a:t>personalized treatment plans</a:t>
+            </a:r>
+            <a:r>
+              <a:rPr kumimoji="0" lang="en-US" altLang="en-US" sz="2000" b="0" i="0" u="none" strike="noStrike" cap="none" normalizeH="0" baseline="0" dirty="0">
+                <a:ln>
+                  <a:noFill/>
+                </a:ln>
+                <a:solidFill>
+                  <a:schemeClr val="tx1"/>
+                </a:solidFill>
+                <a:effectLst/>
+                <a:latin typeface="Lucida Sans Unicode" panose="020B0602030504020204" pitchFamily="34" charset="0"/>
+                <a:cs typeface="Lucida Sans Unicode" panose="020B0602030504020204" pitchFamily="34" charset="0"/>
+              </a:rPr>
+              <a:t> </a:t>
+            </a:r>
+          </a:p>
+          <a:p>
+            <a:pPr marL="0" marR="0" lvl="0" indent="0" algn="l" defTabSz="914400" rtl="0" eaLnBrk="0" fontAlgn="base" latinLnBrk="0" hangingPunct="0">
+              <a:lnSpc>
+                <a:spcPct val="100000"/>
+              </a:lnSpc>
+              <a:spcBef>
+                <a:spcPct val="0"/>
+              </a:spcBef>
+              <a:spcAft>
+                <a:spcPct val="0"/>
+              </a:spcAft>
+              <a:buClrTx/>
+              <a:buSzTx/>
+              <a:buNone/>
+              <a:tabLst/>
+            </a:pPr>
+            <a:endParaRPr kumimoji="0" lang="en-US" altLang="en-US" sz="2000" b="0" i="0" u="none" strike="noStrike" cap="none" normalizeH="0" baseline="0" dirty="0">
+              <a:ln>
+                <a:noFill/>
+              </a:ln>
+              <a:solidFill>
+                <a:schemeClr val="tx1"/>
+              </a:solidFill>
+              <a:effectLst/>
+              <a:latin typeface="Lucida Sans Unicode" panose="020B0602030504020204" pitchFamily="34" charset="0"/>
+              <a:cs typeface="Lucida Sans Unicode" panose="020B0602030504020204" pitchFamily="34" charset="0"/>
+            </a:endParaRPr>
+          </a:p>
+          <a:p>
+            <a:pPr marL="0" marR="0" lvl="0" indent="0" algn="l" defTabSz="914400" rtl="0" eaLnBrk="0" fontAlgn="base" latinLnBrk="0" hangingPunct="0">
+              <a:lnSpc>
+                <a:spcPct val="100000"/>
+              </a:lnSpc>
+              <a:spcBef>
+                <a:spcPct val="0"/>
+              </a:spcBef>
+              <a:spcAft>
+                <a:spcPct val="0"/>
+              </a:spcAft>
+              <a:buClrTx/>
+              <a:buSzTx/>
+              <a:buFontTx/>
+              <a:buChar char="•"/>
+              <a:tabLst/>
+            </a:pPr>
+            <a:r>
+              <a:rPr kumimoji="0" lang="en-US" altLang="en-US" sz="2000" b="0" i="0" u="none" strike="noStrike" cap="none" normalizeH="0" baseline="0" dirty="0">
+                <a:ln>
+                  <a:noFill/>
+                </a:ln>
+                <a:solidFill>
+                  <a:schemeClr val="tx1"/>
+                </a:solidFill>
+                <a:effectLst/>
+                <a:latin typeface="Lucida Sans Unicode" panose="020B0602030504020204" pitchFamily="34" charset="0"/>
+                <a:cs typeface="Lucida Sans Unicode" panose="020B0602030504020204" pitchFamily="34" charset="0"/>
+              </a:rPr>
+              <a:t>Expand analysis with </a:t>
+            </a:r>
+            <a:r>
+              <a:rPr kumimoji="0" lang="en-US" altLang="en-US" sz="2000" b="1" i="0" u="none" strike="noStrike" cap="none" normalizeH="0" baseline="0" dirty="0">
+                <a:ln>
+                  <a:noFill/>
+                </a:ln>
+                <a:solidFill>
+                  <a:schemeClr val="tx1"/>
+                </a:solidFill>
+                <a:effectLst/>
+                <a:latin typeface="Lucida Sans Unicode" panose="020B0602030504020204" pitchFamily="34" charset="0"/>
+                <a:cs typeface="Lucida Sans Unicode" panose="020B0602030504020204" pitchFamily="34" charset="0"/>
+              </a:rPr>
+              <a:t>larger datasets</a:t>
+            </a:r>
+            <a:r>
+              <a:rPr kumimoji="0" lang="en-US" altLang="en-US" sz="2000" b="0" i="0" u="none" strike="noStrike" cap="none" normalizeH="0" baseline="0" dirty="0">
+                <a:ln>
+                  <a:noFill/>
+                </a:ln>
+                <a:solidFill>
+                  <a:schemeClr val="tx1"/>
+                </a:solidFill>
+                <a:effectLst/>
+                <a:latin typeface="Lucida Sans Unicode" panose="020B0602030504020204" pitchFamily="34" charset="0"/>
+                <a:cs typeface="Lucida Sans Unicode" panose="020B0602030504020204" pitchFamily="34" charset="0"/>
+              </a:rPr>
+              <a:t> </a:t>
+            </a:r>
+          </a:p>
+          <a:p>
+            <a:pPr marL="0" marR="0" lvl="0" indent="0" algn="l" defTabSz="914400" rtl="0" eaLnBrk="0" fontAlgn="base" latinLnBrk="0" hangingPunct="0">
+              <a:lnSpc>
+                <a:spcPct val="100000"/>
+              </a:lnSpc>
+              <a:spcBef>
+                <a:spcPct val="0"/>
+              </a:spcBef>
+              <a:spcAft>
+                <a:spcPct val="0"/>
+              </a:spcAft>
+              <a:buClrTx/>
+              <a:buSzTx/>
+              <a:buNone/>
+              <a:tabLst/>
+            </a:pPr>
+            <a:endParaRPr kumimoji="0" lang="en-US" altLang="en-US" sz="2000" b="0" i="0" u="none" strike="noStrike" cap="none" normalizeH="0" baseline="0" dirty="0">
+              <a:ln>
+                <a:noFill/>
+              </a:ln>
+              <a:solidFill>
+                <a:schemeClr val="tx1"/>
+              </a:solidFill>
+              <a:effectLst/>
+              <a:latin typeface="Lucida Sans Unicode" panose="020B0602030504020204" pitchFamily="34" charset="0"/>
+              <a:cs typeface="Lucida Sans Unicode" panose="020B0602030504020204" pitchFamily="34" charset="0"/>
+            </a:endParaRPr>
+          </a:p>
+          <a:p>
+            <a:pPr marL="0" marR="0" lvl="0" indent="0" algn="l" defTabSz="914400" rtl="0" eaLnBrk="0" fontAlgn="base" latinLnBrk="0" hangingPunct="0">
+              <a:lnSpc>
+                <a:spcPct val="100000"/>
+              </a:lnSpc>
+              <a:spcBef>
+                <a:spcPct val="0"/>
+              </a:spcBef>
+              <a:spcAft>
+                <a:spcPct val="0"/>
+              </a:spcAft>
+              <a:buClrTx/>
+              <a:buSzTx/>
+              <a:buFontTx/>
+              <a:buChar char="•"/>
+              <a:tabLst/>
+            </a:pPr>
+            <a:r>
+              <a:rPr kumimoji="0" lang="en-US" altLang="en-US" sz="2000" b="0" i="0" u="none" strike="noStrike" cap="none" normalizeH="0" baseline="0" dirty="0">
+                <a:ln>
+                  <a:noFill/>
+                </a:ln>
+                <a:solidFill>
+                  <a:schemeClr val="tx1"/>
+                </a:solidFill>
+                <a:effectLst/>
+                <a:latin typeface="Lucida Sans Unicode" panose="020B0602030504020204" pitchFamily="34" charset="0"/>
+                <a:cs typeface="Lucida Sans Unicode" panose="020B0602030504020204" pitchFamily="34" charset="0"/>
+              </a:rPr>
+              <a:t>Explore </a:t>
+            </a:r>
+            <a:r>
+              <a:rPr kumimoji="0" lang="en-US" altLang="en-US" sz="2000" b="1" i="0" u="none" strike="noStrike" cap="none" normalizeH="0" baseline="0" dirty="0">
+                <a:ln>
+                  <a:noFill/>
+                </a:ln>
+                <a:solidFill>
+                  <a:schemeClr val="tx1"/>
+                </a:solidFill>
+                <a:effectLst/>
+                <a:latin typeface="Lucida Sans Unicode" panose="020B0602030504020204" pitchFamily="34" charset="0"/>
+                <a:cs typeface="Lucida Sans Unicode" panose="020B0602030504020204" pitchFamily="34" charset="0"/>
+              </a:rPr>
+              <a:t>advanced models (non-linear methods)</a:t>
+            </a:r>
+          </a:p>
+          <a:p>
+            <a:pPr marL="0" marR="0" lvl="0" indent="0" algn="l" defTabSz="914400" rtl="0" eaLnBrk="0" fontAlgn="base" latinLnBrk="0" hangingPunct="0">
+              <a:lnSpc>
+                <a:spcPct val="100000"/>
+              </a:lnSpc>
+              <a:spcBef>
+                <a:spcPct val="0"/>
+              </a:spcBef>
+              <a:spcAft>
+                <a:spcPct val="0"/>
+              </a:spcAft>
+              <a:buClrTx/>
+              <a:buSzTx/>
+              <a:buFontTx/>
+              <a:buChar char="•"/>
+              <a:tabLst/>
+            </a:pPr>
+            <a:endParaRPr lang="en-US" altLang="en-US" sz="2000" b="1" dirty="0">
+              <a:latin typeface="Lucida Sans Unicode" panose="020B0602030504020204" pitchFamily="34" charset="0"/>
+              <a:cs typeface="Lucida Sans Unicode" panose="020B0602030504020204" pitchFamily="34" charset="0"/>
+            </a:endParaRPr>
+          </a:p>
+          <a:p>
+            <a:pPr marL="0" marR="0" lvl="0" indent="0" algn="l" defTabSz="914400" rtl="0" eaLnBrk="0" fontAlgn="base" latinLnBrk="0" hangingPunct="0">
+              <a:lnSpc>
+                <a:spcPct val="100000"/>
+              </a:lnSpc>
+              <a:spcBef>
+                <a:spcPct val="0"/>
+              </a:spcBef>
+              <a:spcAft>
+                <a:spcPct val="0"/>
+              </a:spcAft>
+              <a:buClrTx/>
+              <a:buSzTx/>
+              <a:buNone/>
+              <a:tabLst/>
+            </a:pPr>
+            <a:r>
+              <a:rPr kumimoji="0" lang="en-US" altLang="en-US" sz="2000" b="0" i="0" u="none" strike="noStrike" cap="none" normalizeH="0" baseline="0" dirty="0">
+                <a:ln>
+                  <a:noFill/>
+                </a:ln>
+                <a:solidFill>
+                  <a:schemeClr val="tx1"/>
+                </a:solidFill>
+                <a:effectLst/>
+                <a:latin typeface="Lucida Sans Unicode" panose="020B0602030504020204" pitchFamily="34" charset="0"/>
+                <a:cs typeface="Lucida Sans Unicode" panose="020B0602030504020204" pitchFamily="34" charset="0"/>
+              </a:rPr>
+              <a:t> </a:t>
+            </a:r>
+          </a:p>
+          <a:p>
+            <a:pPr marL="0" marR="0" lvl="0" indent="0" algn="l" defTabSz="914400" rtl="0" eaLnBrk="0" fontAlgn="base" latinLnBrk="0" hangingPunct="0">
+              <a:lnSpc>
+                <a:spcPct val="100000"/>
+              </a:lnSpc>
+              <a:spcBef>
+                <a:spcPct val="0"/>
+              </a:spcBef>
+              <a:spcAft>
+                <a:spcPct val="0"/>
+              </a:spcAft>
+              <a:buClrTx/>
+              <a:buSzTx/>
+              <a:buFontTx/>
+              <a:buChar char="•"/>
+              <a:tabLst/>
+            </a:pPr>
+            <a:r>
+              <a:rPr kumimoji="0" lang="en-US" altLang="en-US" sz="2000" b="0" i="0" u="none" strike="noStrike" cap="none" normalizeH="0" baseline="0" dirty="0">
+                <a:ln>
+                  <a:noFill/>
+                </a:ln>
+                <a:solidFill>
+                  <a:schemeClr val="tx1"/>
+                </a:solidFill>
+                <a:effectLst/>
+                <a:latin typeface="Lucida Sans Unicode" panose="020B0602030504020204" pitchFamily="34" charset="0"/>
+                <a:cs typeface="Lucida Sans Unicode" panose="020B0602030504020204" pitchFamily="34" charset="0"/>
+              </a:rPr>
+              <a:t>Integrate into </a:t>
+            </a:r>
+            <a:r>
+              <a:rPr kumimoji="0" lang="en-US" altLang="en-US" sz="2000" b="1" i="0" u="none" strike="noStrike" cap="none" normalizeH="0" baseline="0" dirty="0">
+                <a:ln>
+                  <a:noFill/>
+                </a:ln>
+                <a:solidFill>
+                  <a:schemeClr val="tx1"/>
+                </a:solidFill>
+                <a:effectLst/>
+                <a:latin typeface="Lucida Sans Unicode" panose="020B0602030504020204" pitchFamily="34" charset="0"/>
+                <a:cs typeface="Lucida Sans Unicode" panose="020B0602030504020204" pitchFamily="34" charset="0"/>
+              </a:rPr>
+              <a:t>clinical decision-support systems</a:t>
+            </a:r>
+            <a:r>
+              <a:rPr kumimoji="0" lang="en-US" altLang="en-US" sz="2000" b="0" i="0" u="none" strike="noStrike" cap="none" normalizeH="0" baseline="0" dirty="0">
+                <a:ln>
+                  <a:noFill/>
+                </a:ln>
+                <a:solidFill>
+                  <a:schemeClr val="tx1"/>
+                </a:solidFill>
+                <a:effectLst/>
+                <a:latin typeface="Lucida Sans Unicode" panose="020B0602030504020204" pitchFamily="34" charset="0"/>
+                <a:cs typeface="Lucida Sans Unicode" panose="020B0602030504020204" pitchFamily="34" charset="0"/>
+              </a:rPr>
+              <a:t> </a:t>
+            </a:r>
+          </a:p>
+        </p:txBody>
+      </p:sp>
+    </p:spTree>
+    <p:extLst>
+      <p:ext uri="{BB962C8B-B14F-4D97-AF65-F5344CB8AC3E}">
+        <p14:creationId xmlns:p14="http://schemas.microsoft.com/office/powerpoint/2010/main" val="2677515576"/>
+      </p:ext>
+    </p:extLst>
+  </p:cSld>
+  <p:clrMapOvr>
+    <a:masterClrMapping/>
+  </p:clrMapOvr>
+</p:sld>
+</file>
+
+<file path=ppt/slides/slide15.xml><?xml version="1.0" encoding="utf-8"?>
+<p:sld xmlns:a="http://schemas.openxmlformats.org/drawingml/2006/main" xmlns:r="http://schemas.openxmlformats.org/officeDocument/2006/relationships" xmlns:p="http://schemas.openxmlformats.org/presentationml/2006/main">
+  <p:cSld>
+    <p:spTree>
+      <p:nvGrpSpPr>
+        <p:cNvPr id="1" name=""/>
+        <p:cNvGrpSpPr/>
+        <p:nvPr/>
+      </p:nvGrpSpPr>
+      <p:grpSpPr>
+        <a:xfrm>
+          <a:off x="0" y="0"/>
+          <a:ext cx="0" cy="0"/>
+          <a:chOff x="0" y="0"/>
+          <a:chExt cx="0" cy="0"/>
+        </a:xfrm>
+      </p:grpSpPr>
+      <p:sp>
+        <p:nvSpPr>
+          <p:cNvPr id="2" name="Title 1">
+            <a:extLst>
+              <a:ext uri="{FF2B5EF4-FFF2-40B4-BE49-F238E27FC236}">
+                <a16:creationId xmlns:a16="http://schemas.microsoft.com/office/drawing/2014/main" id="{4AC7C665-2DD4-767E-5242-3E11D798195F}"/>
+              </a:ext>
+            </a:extLst>
+          </p:cNvPr>
+          <p:cNvSpPr>
+            <a:spLocks noGrp="1"/>
+          </p:cNvSpPr>
+          <p:nvPr>
+            <p:ph type="title"/>
+          </p:nvPr>
+        </p:nvSpPr>
+        <p:spPr>
+          <a:xfrm>
+            <a:off x="685801" y="179882"/>
+            <a:ext cx="10131425" cy="764498"/>
+          </a:xfrm>
+        </p:spPr>
+        <p:txBody>
+          <a:bodyPr>
+            <a:normAutofit/>
+          </a:bodyPr>
+          <a:lstStyle/>
+          <a:p>
+            <a:pPr algn="ctr"/>
+            <a:r>
+              <a:rPr lang="en-US" sz="4000" cap="none" dirty="0"/>
+              <a:t>Conclusion</a:t>
+            </a:r>
+          </a:p>
+        </p:txBody>
+      </p:sp>
+      <p:sp>
+        <p:nvSpPr>
+          <p:cNvPr id="3" name="Content Placeholder 2">
+            <a:extLst>
+              <a:ext uri="{FF2B5EF4-FFF2-40B4-BE49-F238E27FC236}">
+                <a16:creationId xmlns:a16="http://schemas.microsoft.com/office/drawing/2014/main" id="{B6A8B5F4-C1E8-341C-352E-4A9BCA38187F}"/>
+              </a:ext>
+            </a:extLst>
+          </p:cNvPr>
+          <p:cNvSpPr>
+            <a:spLocks noGrp="1"/>
+          </p:cNvSpPr>
+          <p:nvPr>
+            <p:ph idx="1"/>
+          </p:nvPr>
+        </p:nvSpPr>
+        <p:spPr>
+          <a:xfrm>
+            <a:off x="685801" y="944380"/>
+            <a:ext cx="11051497" cy="5081665"/>
+          </a:xfrm>
+        </p:spPr>
+        <p:txBody>
+          <a:bodyPr>
+            <a:normAutofit lnSpcReduction="10000"/>
+          </a:bodyPr>
+          <a:lstStyle/>
+          <a:p>
+            <a:r>
+              <a:rPr lang="en-US" sz="2200" dirty="0">
+                <a:latin typeface="Lucida Sans Unicode" panose="020B0602030504020204" pitchFamily="34" charset="0"/>
+                <a:cs typeface="Lucida Sans Unicode" panose="020B0602030504020204" pitchFamily="34" charset="0"/>
+              </a:rPr>
+              <a:t>This project demonstrated the application of unsupervised machine learning techniques to identify meaningful patient subgroups within cardiometabolic data. Through careful preprocessing, dimensionality reduction using Principal Component Analysis, and clustering with K-means, three distinct patient profiles were identified: low risk, metabolic syndrome, and high cardiovascular risk.</a:t>
+            </a:r>
+          </a:p>
+          <a:p>
+            <a:r>
+              <a:rPr lang="en-US" sz="2200" dirty="0">
+                <a:latin typeface="Lucida Sans Unicode" panose="020B0602030504020204" pitchFamily="34" charset="0"/>
+                <a:cs typeface="Lucida Sans Unicode" panose="020B0602030504020204" pitchFamily="34" charset="0"/>
+              </a:rPr>
+              <a:t>These clusters reflect clinically relevant patterns in age, body composition, blood pressure, lipid levels, and glucose regulation, highlighting the ability of data-driven methods to uncover hidden structures in complex health data. Despite moderate cluster separation and limitations related to sample size and model assumptions, the results show strong alignment with known medical risk profiles.</a:t>
+            </a:r>
+          </a:p>
+          <a:p>
+            <a:r>
+              <a:rPr lang="en-US" sz="2200" dirty="0">
+                <a:latin typeface="Lucida Sans Unicode" panose="020B0602030504020204" pitchFamily="34" charset="0"/>
+                <a:cs typeface="Lucida Sans Unicode" panose="020B0602030504020204" pitchFamily="34" charset="0"/>
+              </a:rPr>
+              <a:t>Overall, this analysis demonstrates the potential of unsupervised learning to support early risk detection, improve patient stratification, and contribute to more targeted and personalized approaches in preventive healthcare.</a:t>
+            </a:r>
+          </a:p>
+          <a:p>
+            <a:endParaRPr lang="en-US" dirty="0"/>
+          </a:p>
+        </p:txBody>
+      </p:sp>
+    </p:spTree>
+    <p:extLst>
+      <p:ext uri="{BB962C8B-B14F-4D97-AF65-F5344CB8AC3E}">
+        <p14:creationId xmlns:p14="http://schemas.microsoft.com/office/powerpoint/2010/main" val="3752435962"/>
       </p:ext>
     </p:extLst>
   </p:cSld>
@@ -6667,7 +8753,23 @@
                 <a:ea typeface="Cascadia Code Light" panose="020B0609020000020004" pitchFamily="49" charset="0"/>
                 <a:cs typeface="Lucida Sans Unicode" panose="020B0602030504020204" pitchFamily="34" charset="0"/>
               </a:rPr>
-              <a:t> with cardiometabolic biomarkers. After rigorous preprocessing (handling </a:t>
+              <a:t> with cardiometabolic biomarkers. After rigorous preprocessing (</a:t>
+            </a:r>
+            <a:r>
+              <a:rPr lang="en-US" sz="2000">
+                <a:latin typeface="Lucida Sans Unicode" panose="020B0602030504020204" pitchFamily="34" charset="0"/>
+                <a:ea typeface="Cascadia Code Light" panose="020B0609020000020004" pitchFamily="49" charset="0"/>
+                <a:cs typeface="Lucida Sans Unicode" panose="020B0602030504020204" pitchFamily="34" charset="0"/>
+              </a:rPr>
+              <a:t>handling </a:t>
+            </a:r>
+            <a:r>
+              <a:rPr lang="en-US" sz="2000" b="1">
+                <a:latin typeface="Lucida Sans Unicode" panose="020B0602030504020204" pitchFamily="34" charset="0"/>
+                <a:ea typeface="Cascadia Code Light" panose="020B0609020000020004" pitchFamily="49" charset="0"/>
+                <a:cs typeface="Lucida Sans Unicode" panose="020B0602030504020204" pitchFamily="34" charset="0"/>
+              </a:rPr>
+              <a:t>8% </a:t>
             </a:r>
             <a:r>
               <a:rPr lang="en-US" sz="2000" b="1" dirty="0">
@@ -6675,7 +8777,7 @@
                 <a:ea typeface="Cascadia Code Light" panose="020B0609020000020004" pitchFamily="49" charset="0"/>
                 <a:cs typeface="Lucida Sans Unicode" panose="020B0602030504020204" pitchFamily="34" charset="0"/>
               </a:rPr>
-              <a:t>5.2% missing values</a:t>
+              <a:t>missing values</a:t>
             </a:r>
             <a:r>
               <a:rPr lang="en-US" sz="2000" dirty="0">
@@ -7380,7 +9482,7 @@
         <p:spPr>
           <a:xfrm>
             <a:off x="6096000" y="1066801"/>
-            <a:ext cx="5971082" cy="5324535"/>
+            <a:ext cx="5971082" cy="5940088"/>
           </a:xfrm>
           <a:prstGeom prst="rect">
             <a:avLst/>
@@ -7392,6 +9494,30 @@
             <a:spAutoFit/>
           </a:bodyPr>
           <a:lstStyle/>
+          <a:p>
+            <a:r>
+              <a:rPr lang="en-US" dirty="0"/>
+              <a:t>*</a:t>
+            </a:r>
+            <a:r>
+              <a:rPr lang="en-US" sz="2000" dirty="0">
+                <a:latin typeface="Lucida Sans Unicode" panose="020B0602030504020204" pitchFamily="34" charset="0"/>
+                <a:cs typeface="Lucida Sans Unicode" panose="020B0602030504020204" pitchFamily="34" charset="0"/>
+              </a:rPr>
+              <a:t>Outliers were primarily observed in physical activity, triglycerides, CRP &amp; </a:t>
+            </a:r>
+            <a:r>
+              <a:rPr lang="en-US" sz="2000" dirty="0" err="1">
+                <a:latin typeface="Lucida Sans Unicode" panose="020B0602030504020204" pitchFamily="34" charset="0"/>
+                <a:cs typeface="Lucida Sans Unicode" panose="020B0602030504020204" pitchFamily="34" charset="0"/>
+              </a:rPr>
+              <a:t>glucose_fasting</a:t>
+            </a:r>
+            <a:endParaRPr lang="en-US" dirty="0">
+              <a:latin typeface="Lucida Sans Unicode" panose="020B0602030504020204" pitchFamily="34" charset="0"/>
+              <a:cs typeface="Lucida Sans Unicode" panose="020B0602030504020204" pitchFamily="34" charset="0"/>
+            </a:endParaRPr>
+          </a:p>
           <a:p>
             <a:r>
               <a:rPr lang="en-US" dirty="0"/>
@@ -7571,8 +9697,8 @@
         </p:nvSpPr>
         <p:spPr>
           <a:xfrm>
-            <a:off x="685801" y="944381"/>
-            <a:ext cx="10131425" cy="5748726"/>
+            <a:off x="685801" y="1094281"/>
+            <a:ext cx="10131425" cy="5598825"/>
           </a:xfrm>
         </p:spPr>
         <p:txBody>
@@ -7760,7 +9886,7 @@
         <p:spPr>
           <a:xfrm>
             <a:off x="134911" y="779489"/>
-            <a:ext cx="6094131" cy="5913618"/>
+            <a:ext cx="6965430" cy="5913618"/>
           </a:xfrm>
           <a:prstGeom prst="rect">
             <a:avLst/>
@@ -7781,8 +9907,8 @@
         </p:nvSpPr>
         <p:spPr>
           <a:xfrm>
-            <a:off x="6565692" y="929391"/>
-            <a:ext cx="5156616" cy="3970318"/>
+            <a:off x="7570032" y="929391"/>
+            <a:ext cx="4621967" cy="6217087"/>
           </a:xfrm>
           <a:prstGeom prst="rect">
             <a:avLst/>
@@ -7797,236 +9923,383 @@
           <a:p>
             <a:pPr latinLnBrk="1"/>
             <a:r>
-              <a:rPr lang="en-US" dirty="0"/>
+              <a:rPr lang="en-US" sz="2000" dirty="0">
+                <a:latin typeface="Lucida Sans Unicode" panose="020B0602030504020204" pitchFamily="34" charset="0"/>
+                <a:cs typeface="Lucida Sans Unicode" panose="020B0602030504020204" pitchFamily="34" charset="0"/>
+              </a:rPr>
               <a:t>Strongest Positive Correlations:</a:t>
             </a:r>
           </a:p>
           <a:p>
             <a:pPr latinLnBrk="1"/>
             <a:r>
-              <a:rPr lang="en-US" dirty="0"/>
+              <a:rPr lang="en-US" sz="2000" dirty="0">
+                <a:latin typeface="Lucida Sans Unicode" panose="020B0602030504020204" pitchFamily="34" charset="0"/>
+                <a:cs typeface="Lucida Sans Unicode" panose="020B0602030504020204" pitchFamily="34" charset="0"/>
+              </a:rPr>
               <a:t>  </a:t>
             </a:r>
             <a:r>
-              <a:rPr lang="en-US" dirty="0" err="1"/>
+              <a:rPr lang="en-US" sz="2000" dirty="0" err="1">
+                <a:latin typeface="Lucida Sans Unicode" panose="020B0602030504020204" pitchFamily="34" charset="0"/>
+                <a:cs typeface="Lucida Sans Unicode" panose="020B0602030504020204" pitchFamily="34" charset="0"/>
+              </a:rPr>
               <a:t>cholesterol_ldl</a:t>
             </a:r>
             <a:r>
-              <a:rPr lang="en-US" dirty="0"/>
+              <a:rPr lang="en-US" sz="2000" dirty="0">
+                <a:latin typeface="Lucida Sans Unicode" panose="020B0602030504020204" pitchFamily="34" charset="0"/>
+                <a:cs typeface="Lucida Sans Unicode" panose="020B0602030504020204" pitchFamily="34" charset="0"/>
+              </a:rPr>
               <a:t> ↔ </a:t>
             </a:r>
             <a:r>
-              <a:rPr lang="en-US" dirty="0" err="1"/>
+              <a:rPr lang="en-US" sz="2000" dirty="0" err="1">
+                <a:latin typeface="Lucida Sans Unicode" panose="020B0602030504020204" pitchFamily="34" charset="0"/>
+                <a:cs typeface="Lucida Sans Unicode" panose="020B0602030504020204" pitchFamily="34" charset="0"/>
+              </a:rPr>
               <a:t>cholesterol_total</a:t>
             </a:r>
             <a:r>
-              <a:rPr lang="en-US" dirty="0"/>
+              <a:rPr lang="en-US" sz="2000" dirty="0">
+                <a:latin typeface="Lucida Sans Unicode" panose="020B0602030504020204" pitchFamily="34" charset="0"/>
+                <a:cs typeface="Lucida Sans Unicode" panose="020B0602030504020204" pitchFamily="34" charset="0"/>
+              </a:rPr>
               <a:t>: 0.911</a:t>
             </a:r>
           </a:p>
           <a:p>
             <a:pPr latinLnBrk="1"/>
             <a:r>
-              <a:rPr lang="en-US" dirty="0"/>
+              <a:rPr lang="en-US" sz="2000" dirty="0">
+                <a:latin typeface="Lucida Sans Unicode" panose="020B0602030504020204" pitchFamily="34" charset="0"/>
+                <a:cs typeface="Lucida Sans Unicode" panose="020B0602030504020204" pitchFamily="34" charset="0"/>
+              </a:rPr>
               <a:t>  hba1c ↔ </a:t>
             </a:r>
             <a:r>
-              <a:rPr lang="en-US" dirty="0" err="1"/>
+              <a:rPr lang="en-US" sz="2000" dirty="0" err="1">
+                <a:latin typeface="Lucida Sans Unicode" panose="020B0602030504020204" pitchFamily="34" charset="0"/>
+                <a:cs typeface="Lucida Sans Unicode" panose="020B0602030504020204" pitchFamily="34" charset="0"/>
+              </a:rPr>
               <a:t>glucose_fasting</a:t>
             </a:r>
             <a:r>
-              <a:rPr lang="en-US" dirty="0"/>
+              <a:rPr lang="en-US" sz="2000" dirty="0">
+                <a:latin typeface="Lucida Sans Unicode" panose="020B0602030504020204" pitchFamily="34" charset="0"/>
+                <a:cs typeface="Lucida Sans Unicode" panose="020B0602030504020204" pitchFamily="34" charset="0"/>
+              </a:rPr>
               <a:t>: 0.387</a:t>
             </a:r>
           </a:p>
           <a:p>
             <a:pPr latinLnBrk="1"/>
             <a:r>
-              <a:rPr lang="en-US" dirty="0"/>
+              <a:rPr lang="en-US" sz="2000" dirty="0">
+                <a:latin typeface="Lucida Sans Unicode" panose="020B0602030504020204" pitchFamily="34" charset="0"/>
+                <a:cs typeface="Lucida Sans Unicode" panose="020B0602030504020204" pitchFamily="34" charset="0"/>
+              </a:rPr>
               <a:t>  </a:t>
             </a:r>
             <a:r>
-              <a:rPr lang="en-US" dirty="0" err="1"/>
+              <a:rPr lang="en-US" sz="2000" dirty="0" err="1">
+                <a:latin typeface="Lucida Sans Unicode" panose="020B0602030504020204" pitchFamily="34" charset="0"/>
+                <a:cs typeface="Lucida Sans Unicode" panose="020B0602030504020204" pitchFamily="34" charset="0"/>
+              </a:rPr>
               <a:t>bp_diastolic</a:t>
             </a:r>
             <a:r>
-              <a:rPr lang="en-US" dirty="0"/>
+              <a:rPr lang="en-US" sz="2000" dirty="0">
+                <a:latin typeface="Lucida Sans Unicode" panose="020B0602030504020204" pitchFamily="34" charset="0"/>
+                <a:cs typeface="Lucida Sans Unicode" panose="020B0602030504020204" pitchFamily="34" charset="0"/>
+              </a:rPr>
               <a:t> ↔ </a:t>
             </a:r>
             <a:r>
-              <a:rPr lang="en-US" dirty="0" err="1"/>
+              <a:rPr lang="en-US" sz="2000" dirty="0" err="1">
+                <a:latin typeface="Lucida Sans Unicode" panose="020B0602030504020204" pitchFamily="34" charset="0"/>
+                <a:cs typeface="Lucida Sans Unicode" panose="020B0602030504020204" pitchFamily="34" charset="0"/>
+              </a:rPr>
               <a:t>bp_systolic</a:t>
             </a:r>
             <a:r>
-              <a:rPr lang="en-US" dirty="0"/>
+              <a:rPr lang="en-US" sz="2000" dirty="0">
+                <a:latin typeface="Lucida Sans Unicode" panose="020B0602030504020204" pitchFamily="34" charset="0"/>
+                <a:cs typeface="Lucida Sans Unicode" panose="020B0602030504020204" pitchFamily="34" charset="0"/>
+              </a:rPr>
               <a:t>: 0.269</a:t>
             </a:r>
           </a:p>
           <a:p>
             <a:pPr latinLnBrk="1"/>
             <a:r>
-              <a:rPr lang="en-US" dirty="0"/>
+              <a:rPr lang="en-US" sz="2000" dirty="0">
+                <a:latin typeface="Lucida Sans Unicode" panose="020B0602030504020204" pitchFamily="34" charset="0"/>
+                <a:cs typeface="Lucida Sans Unicode" panose="020B0602030504020204" pitchFamily="34" charset="0"/>
+              </a:rPr>
               <a:t>  </a:t>
             </a:r>
             <a:r>
-              <a:rPr lang="en-US" dirty="0" err="1"/>
+              <a:rPr lang="en-US" sz="2000" dirty="0" err="1">
+                <a:latin typeface="Lucida Sans Unicode" panose="020B0602030504020204" pitchFamily="34" charset="0"/>
+                <a:cs typeface="Lucida Sans Unicode" panose="020B0602030504020204" pitchFamily="34" charset="0"/>
+              </a:rPr>
               <a:t>waist_cm</a:t>
             </a:r>
             <a:r>
-              <a:rPr lang="en-US" dirty="0"/>
+              <a:rPr lang="en-US" sz="2000" dirty="0">
+                <a:latin typeface="Lucida Sans Unicode" panose="020B0602030504020204" pitchFamily="34" charset="0"/>
+                <a:cs typeface="Lucida Sans Unicode" panose="020B0602030504020204" pitchFamily="34" charset="0"/>
+              </a:rPr>
               <a:t> ↔ </a:t>
             </a:r>
             <a:r>
-              <a:rPr lang="en-US" dirty="0" err="1"/>
+              <a:rPr lang="en-US" sz="2000" dirty="0" err="1">
+                <a:latin typeface="Lucida Sans Unicode" panose="020B0602030504020204" pitchFamily="34" charset="0"/>
+                <a:cs typeface="Lucida Sans Unicode" panose="020B0602030504020204" pitchFamily="34" charset="0"/>
+              </a:rPr>
               <a:t>bmi</a:t>
             </a:r>
             <a:r>
-              <a:rPr lang="en-US" dirty="0"/>
+              <a:rPr lang="en-US" sz="2000" dirty="0">
+                <a:latin typeface="Lucida Sans Unicode" panose="020B0602030504020204" pitchFamily="34" charset="0"/>
+                <a:cs typeface="Lucida Sans Unicode" panose="020B0602030504020204" pitchFamily="34" charset="0"/>
+              </a:rPr>
               <a:t>: 0.241</a:t>
             </a:r>
           </a:p>
           <a:p>
             <a:pPr latinLnBrk="1"/>
             <a:r>
-              <a:rPr lang="en-US" dirty="0"/>
+              <a:rPr lang="en-US" sz="2000" dirty="0">
+                <a:latin typeface="Lucida Sans Unicode" panose="020B0602030504020204" pitchFamily="34" charset="0"/>
+                <a:cs typeface="Lucida Sans Unicode" panose="020B0602030504020204" pitchFamily="34" charset="0"/>
+              </a:rPr>
               <a:t>  </a:t>
             </a:r>
             <a:r>
-              <a:rPr lang="en-US" dirty="0" err="1"/>
+              <a:rPr lang="en-US" sz="2000" dirty="0" err="1">
+                <a:latin typeface="Lucida Sans Unicode" panose="020B0602030504020204" pitchFamily="34" charset="0"/>
+                <a:cs typeface="Lucida Sans Unicode" panose="020B0602030504020204" pitchFamily="34" charset="0"/>
+              </a:rPr>
               <a:t>cholesterol_hdl</a:t>
             </a:r>
             <a:r>
-              <a:rPr lang="en-US" dirty="0"/>
+              <a:rPr lang="en-US" sz="2000" dirty="0">
+                <a:latin typeface="Lucida Sans Unicode" panose="020B0602030504020204" pitchFamily="34" charset="0"/>
+                <a:cs typeface="Lucida Sans Unicode" panose="020B0602030504020204" pitchFamily="34" charset="0"/>
+              </a:rPr>
               <a:t> ↔ </a:t>
             </a:r>
             <a:r>
-              <a:rPr lang="en-US" dirty="0" err="1"/>
+              <a:rPr lang="en-US" sz="2000" dirty="0" err="1">
+                <a:latin typeface="Lucida Sans Unicode" panose="020B0602030504020204" pitchFamily="34" charset="0"/>
+                <a:cs typeface="Lucida Sans Unicode" panose="020B0602030504020204" pitchFamily="34" charset="0"/>
+              </a:rPr>
               <a:t>waist_cm</a:t>
             </a:r>
             <a:r>
-              <a:rPr lang="en-US" dirty="0"/>
+              <a:rPr lang="en-US" sz="2000" dirty="0">
+                <a:latin typeface="Lucida Sans Unicode" panose="020B0602030504020204" pitchFamily="34" charset="0"/>
+                <a:cs typeface="Lucida Sans Unicode" panose="020B0602030504020204" pitchFamily="34" charset="0"/>
+              </a:rPr>
               <a:t>: 0.215</a:t>
             </a:r>
           </a:p>
           <a:p>
+            <a:endParaRPr lang="en-US" sz="2000" dirty="0">
+              <a:latin typeface="Lucida Sans Unicode" panose="020B0602030504020204" pitchFamily="34" charset="0"/>
+              <a:cs typeface="Lucida Sans Unicode" panose="020B0602030504020204" pitchFamily="34" charset="0"/>
+            </a:endParaRPr>
+          </a:p>
+          <a:p>
+            <a:pPr latinLnBrk="1"/>
+            <a:r>
+              <a:rPr lang="en-US" sz="2000" dirty="0">
+                <a:latin typeface="Lucida Sans Unicode" panose="020B0602030504020204" pitchFamily="34" charset="0"/>
+                <a:cs typeface="Lucida Sans Unicode" panose="020B0602030504020204" pitchFamily="34" charset="0"/>
+              </a:rPr>
+              <a:t>Strongest Negative Correlations:</a:t>
+            </a:r>
+          </a:p>
+          <a:p>
+            <a:pPr latinLnBrk="1"/>
+            <a:r>
+              <a:rPr lang="en-US" sz="2000" dirty="0">
+                <a:latin typeface="Lucida Sans Unicode" panose="020B0602030504020204" pitchFamily="34" charset="0"/>
+                <a:cs typeface="Lucida Sans Unicode" panose="020B0602030504020204" pitchFamily="34" charset="0"/>
+              </a:rPr>
+              <a:t>  </a:t>
+            </a:r>
+            <a:r>
+              <a:rPr lang="en-US" sz="2000" dirty="0" err="1">
+                <a:latin typeface="Lucida Sans Unicode" panose="020B0602030504020204" pitchFamily="34" charset="0"/>
+                <a:cs typeface="Lucida Sans Unicode" panose="020B0602030504020204" pitchFamily="34" charset="0"/>
+              </a:rPr>
+              <a:t>bp_diastolic</a:t>
+            </a:r>
+            <a:r>
+              <a:rPr lang="en-US" sz="2000" dirty="0">
+                <a:latin typeface="Lucida Sans Unicode" panose="020B0602030504020204" pitchFamily="34" charset="0"/>
+                <a:cs typeface="Lucida Sans Unicode" panose="020B0602030504020204" pitchFamily="34" charset="0"/>
+              </a:rPr>
+              <a:t> ↔ age: -0.303</a:t>
+            </a:r>
+          </a:p>
+          <a:p>
+            <a:pPr latinLnBrk="1"/>
+            <a:r>
+              <a:rPr lang="en-US" sz="2000" dirty="0">
+                <a:latin typeface="Lucida Sans Unicode" panose="020B0602030504020204" pitchFamily="34" charset="0"/>
+                <a:cs typeface="Lucida Sans Unicode" panose="020B0602030504020204" pitchFamily="34" charset="0"/>
+              </a:rPr>
+              <a:t>  </a:t>
+            </a:r>
+            <a:r>
+              <a:rPr lang="en-US" sz="2000" dirty="0" err="1">
+                <a:latin typeface="Lucida Sans Unicode" panose="020B0602030504020204" pitchFamily="34" charset="0"/>
+                <a:cs typeface="Lucida Sans Unicode" panose="020B0602030504020204" pitchFamily="34" charset="0"/>
+              </a:rPr>
+              <a:t>physical_activity_min_week</a:t>
+            </a:r>
+            <a:r>
+              <a:rPr lang="en-US" sz="2000" dirty="0">
+                <a:latin typeface="Lucida Sans Unicode" panose="020B0602030504020204" pitchFamily="34" charset="0"/>
+                <a:cs typeface="Lucida Sans Unicode" panose="020B0602030504020204" pitchFamily="34" charset="0"/>
+              </a:rPr>
+              <a:t> ↔ </a:t>
+            </a:r>
+            <a:r>
+              <a:rPr lang="en-US" sz="2000" dirty="0" err="1">
+                <a:latin typeface="Lucida Sans Unicode" panose="020B0602030504020204" pitchFamily="34" charset="0"/>
+                <a:cs typeface="Lucida Sans Unicode" panose="020B0602030504020204" pitchFamily="34" charset="0"/>
+              </a:rPr>
+              <a:t>waist_cm</a:t>
+            </a:r>
+            <a:r>
+              <a:rPr lang="en-US" sz="2000" dirty="0">
+                <a:latin typeface="Lucida Sans Unicode" panose="020B0602030504020204" pitchFamily="34" charset="0"/>
+                <a:cs typeface="Lucida Sans Unicode" panose="020B0602030504020204" pitchFamily="34" charset="0"/>
+              </a:rPr>
+              <a:t>: -0.296</a:t>
+            </a:r>
+          </a:p>
+          <a:p>
+            <a:pPr latinLnBrk="1"/>
+            <a:r>
+              <a:rPr lang="en-US" sz="2000" dirty="0">
+                <a:latin typeface="Lucida Sans Unicode" panose="020B0602030504020204" pitchFamily="34" charset="0"/>
+                <a:cs typeface="Lucida Sans Unicode" panose="020B0602030504020204" pitchFamily="34" charset="0"/>
+              </a:rPr>
+              <a:t>  </a:t>
+            </a:r>
+            <a:r>
+              <a:rPr lang="en-US" sz="2000" dirty="0" err="1">
+                <a:latin typeface="Lucida Sans Unicode" panose="020B0602030504020204" pitchFamily="34" charset="0"/>
+                <a:cs typeface="Lucida Sans Unicode" panose="020B0602030504020204" pitchFamily="34" charset="0"/>
+              </a:rPr>
+              <a:t>glucose_fasting</a:t>
+            </a:r>
+            <a:r>
+              <a:rPr lang="en-US" sz="2000" dirty="0">
+                <a:latin typeface="Lucida Sans Unicode" panose="020B0602030504020204" pitchFamily="34" charset="0"/>
+                <a:cs typeface="Lucida Sans Unicode" panose="020B0602030504020204" pitchFamily="34" charset="0"/>
+              </a:rPr>
+              <a:t> ↔ </a:t>
+            </a:r>
+            <a:r>
+              <a:rPr lang="en-US" sz="2000" dirty="0" err="1">
+                <a:latin typeface="Lucida Sans Unicode" panose="020B0602030504020204" pitchFamily="34" charset="0"/>
+                <a:cs typeface="Lucida Sans Unicode" panose="020B0602030504020204" pitchFamily="34" charset="0"/>
+              </a:rPr>
+              <a:t>waist_cm</a:t>
+            </a:r>
+            <a:r>
+              <a:rPr lang="en-US" sz="2000" dirty="0">
+                <a:latin typeface="Lucida Sans Unicode" panose="020B0602030504020204" pitchFamily="34" charset="0"/>
+                <a:cs typeface="Lucida Sans Unicode" panose="020B0602030504020204" pitchFamily="34" charset="0"/>
+              </a:rPr>
+              <a:t>: -0.234</a:t>
+            </a:r>
+          </a:p>
+          <a:p>
+            <a:pPr latinLnBrk="1"/>
+            <a:r>
+              <a:rPr lang="en-US" sz="2000" dirty="0">
+                <a:latin typeface="Lucida Sans Unicode" panose="020B0602030504020204" pitchFamily="34" charset="0"/>
+                <a:cs typeface="Lucida Sans Unicode" panose="020B0602030504020204" pitchFamily="34" charset="0"/>
+              </a:rPr>
+              <a:t>  </a:t>
+            </a:r>
+            <a:r>
+              <a:rPr lang="en-US" sz="2000" dirty="0" err="1">
+                <a:latin typeface="Lucida Sans Unicode" panose="020B0602030504020204" pitchFamily="34" charset="0"/>
+                <a:cs typeface="Lucida Sans Unicode" panose="020B0602030504020204" pitchFamily="34" charset="0"/>
+              </a:rPr>
+              <a:t>cholesterol_ldl</a:t>
+            </a:r>
+            <a:r>
+              <a:rPr lang="en-US" sz="2000" dirty="0">
+                <a:latin typeface="Lucida Sans Unicode" panose="020B0602030504020204" pitchFamily="34" charset="0"/>
+                <a:cs typeface="Lucida Sans Unicode" panose="020B0602030504020204" pitchFamily="34" charset="0"/>
+              </a:rPr>
+              <a:t> ↔ </a:t>
+            </a:r>
+            <a:r>
+              <a:rPr lang="en-US" sz="2000" dirty="0" err="1">
+                <a:latin typeface="Lucida Sans Unicode" panose="020B0602030504020204" pitchFamily="34" charset="0"/>
+                <a:cs typeface="Lucida Sans Unicode" panose="020B0602030504020204" pitchFamily="34" charset="0"/>
+              </a:rPr>
+              <a:t>cholesterol_hdl</a:t>
+            </a:r>
+            <a:r>
+              <a:rPr lang="en-US" sz="2000" dirty="0">
+                <a:latin typeface="Lucida Sans Unicode" panose="020B0602030504020204" pitchFamily="34" charset="0"/>
+                <a:cs typeface="Lucida Sans Unicode" panose="020B0602030504020204" pitchFamily="34" charset="0"/>
+              </a:rPr>
+              <a:t>: -0.220</a:t>
+            </a:r>
+          </a:p>
+          <a:p>
+            <a:pPr latinLnBrk="1"/>
+            <a:r>
+              <a:rPr lang="en-US" sz="2000" dirty="0">
+                <a:latin typeface="Lucida Sans Unicode" panose="020B0602030504020204" pitchFamily="34" charset="0"/>
+                <a:cs typeface="Lucida Sans Unicode" panose="020B0602030504020204" pitchFamily="34" charset="0"/>
+              </a:rPr>
+              <a:t>  </a:t>
+            </a:r>
+            <a:r>
+              <a:rPr lang="en-US" sz="2000" dirty="0" err="1">
+                <a:latin typeface="Lucida Sans Unicode" panose="020B0602030504020204" pitchFamily="34" charset="0"/>
+                <a:cs typeface="Lucida Sans Unicode" panose="020B0602030504020204" pitchFamily="34" charset="0"/>
+              </a:rPr>
+              <a:t>cholesterol_total</a:t>
+            </a:r>
+            <a:r>
+              <a:rPr lang="en-US" sz="2000" dirty="0">
+                <a:latin typeface="Lucida Sans Unicode" panose="020B0602030504020204" pitchFamily="34" charset="0"/>
+                <a:cs typeface="Lucida Sans Unicode" panose="020B0602030504020204" pitchFamily="34" charset="0"/>
+              </a:rPr>
+              <a:t> ↔ </a:t>
+            </a:r>
+            <a:r>
+              <a:rPr lang="en-US" sz="2000" dirty="0" err="1">
+                <a:latin typeface="Lucida Sans Unicode" panose="020B0602030504020204" pitchFamily="34" charset="0"/>
+                <a:cs typeface="Lucida Sans Unicode" panose="020B0602030504020204" pitchFamily="34" charset="0"/>
+              </a:rPr>
+              <a:t>bp_diastolic</a:t>
+            </a:r>
+            <a:r>
+              <a:rPr lang="en-US" sz="2000" dirty="0">
+                <a:latin typeface="Lucida Sans Unicode" panose="020B0602030504020204" pitchFamily="34" charset="0"/>
+                <a:cs typeface="Lucida Sans Unicode" panose="020B0602030504020204" pitchFamily="34" charset="0"/>
+              </a:rPr>
+              <a:t>: -0.192</a:t>
+            </a:r>
+          </a:p>
+          <a:p>
             <a:endParaRPr lang="en-US" dirty="0"/>
-          </a:p>
-          <a:p>
-            <a:pPr latinLnBrk="1"/>
-            <a:r>
-              <a:rPr lang="en-US" dirty="0"/>
-              <a:t>Strongest Negative Correlations:</a:t>
-            </a:r>
-          </a:p>
-          <a:p>
-            <a:pPr latinLnBrk="1"/>
-            <a:r>
-              <a:rPr lang="en-US" dirty="0"/>
-              <a:t>  </a:t>
-            </a:r>
-            <a:r>
-              <a:rPr lang="en-US" dirty="0" err="1"/>
-              <a:t>bp_diastolic</a:t>
-            </a:r>
-            <a:r>
-              <a:rPr lang="en-US" dirty="0"/>
-              <a:t> ↔ age: -0.303</a:t>
-            </a:r>
-          </a:p>
-          <a:p>
-            <a:pPr latinLnBrk="1"/>
-            <a:r>
-              <a:rPr lang="en-US" dirty="0"/>
-              <a:t>  </a:t>
-            </a:r>
-            <a:r>
-              <a:rPr lang="en-US" dirty="0" err="1"/>
-              <a:t>physical_activity_min_week</a:t>
-            </a:r>
-            <a:r>
-              <a:rPr lang="en-US" dirty="0"/>
-              <a:t> ↔ </a:t>
-            </a:r>
-            <a:r>
-              <a:rPr lang="en-US" dirty="0" err="1"/>
-              <a:t>waist_cm</a:t>
-            </a:r>
-            <a:r>
-              <a:rPr lang="en-US" dirty="0"/>
-              <a:t>: -0.296</a:t>
-            </a:r>
-          </a:p>
-          <a:p>
-            <a:pPr latinLnBrk="1"/>
-            <a:r>
-              <a:rPr lang="en-US" dirty="0"/>
-              <a:t>  </a:t>
-            </a:r>
-            <a:r>
-              <a:rPr lang="en-US" dirty="0" err="1"/>
-              <a:t>glucose_fasting</a:t>
-            </a:r>
-            <a:r>
-              <a:rPr lang="en-US" dirty="0"/>
-              <a:t> ↔ </a:t>
-            </a:r>
-            <a:r>
-              <a:rPr lang="en-US" dirty="0" err="1"/>
-              <a:t>waist_cm</a:t>
-            </a:r>
-            <a:r>
-              <a:rPr lang="en-US" dirty="0"/>
-              <a:t>: -0.234</a:t>
-            </a:r>
-          </a:p>
-          <a:p>
-            <a:pPr latinLnBrk="1"/>
-            <a:r>
-              <a:rPr lang="en-US" dirty="0"/>
-              <a:t>  </a:t>
-            </a:r>
-            <a:r>
-              <a:rPr lang="en-US" dirty="0" err="1"/>
-              <a:t>cholesterol_ldl</a:t>
-            </a:r>
-            <a:r>
-              <a:rPr lang="en-US" dirty="0"/>
-              <a:t> ↔ </a:t>
-            </a:r>
-            <a:r>
-              <a:rPr lang="en-US" dirty="0" err="1"/>
-              <a:t>cholesterol_hdl</a:t>
-            </a:r>
-            <a:r>
-              <a:rPr lang="en-US" dirty="0"/>
-              <a:t>: -0.220</a:t>
-            </a:r>
-          </a:p>
-          <a:p>
-            <a:pPr latinLnBrk="1"/>
-            <a:r>
-              <a:rPr lang="en-US" dirty="0"/>
-              <a:t>  </a:t>
-            </a:r>
-            <a:r>
-              <a:rPr lang="en-US" dirty="0" err="1"/>
-              <a:t>cholesterol_total</a:t>
-            </a:r>
-            <a:r>
-              <a:rPr lang="en-US" dirty="0"/>
-              <a:t> ↔ </a:t>
-            </a:r>
-            <a:r>
-              <a:rPr lang="en-US" dirty="0" err="1"/>
-              <a:t>bp_diastolic</a:t>
-            </a:r>
-            <a:r>
-              <a:rPr lang="en-US"/>
-              <a:t>: -0.192</a:t>
-            </a:r>
-          </a:p>
-          <a:p>
-            <a:endParaRPr lang="en-US"/>
           </a:p>
         </p:txBody>
       </p:sp>
@@ -8114,18 +10387,232 @@
         </p:nvSpPr>
         <p:spPr>
           <a:xfrm>
-            <a:off x="685801" y="629587"/>
-            <a:ext cx="10820398" cy="5161613"/>
+            <a:off x="5291529" y="629587"/>
+            <a:ext cx="6214670" cy="5975471"/>
           </a:xfrm>
         </p:spPr>
         <p:txBody>
-          <a:bodyPr/>
+          <a:bodyPr>
+            <a:normAutofit fontScale="25000" lnSpcReduction="20000"/>
+          </a:bodyPr>
           <a:lstStyle/>
           <a:p>
-            <a:endParaRPr lang="en-US" dirty="0"/>
-          </a:p>
-        </p:txBody>
-      </p:sp>
+            <a:pPr marL="0" indent="0">
+              <a:buNone/>
+            </a:pPr>
+            <a:endParaRPr lang="en-US" sz="6200" dirty="0">
+              <a:latin typeface="Lucida Sans Unicode" panose="020B0602030504020204" pitchFamily="34" charset="0"/>
+              <a:cs typeface="Lucida Sans Unicode" panose="020B0602030504020204" pitchFamily="34" charset="0"/>
+            </a:endParaRPr>
+          </a:p>
+          <a:p>
+            <a:pPr marL="0" indent="0" algn="just">
+              <a:buNone/>
+            </a:pPr>
+            <a:r>
+              <a:rPr lang="en-US" altLang="en-US" sz="8000" dirty="0">
+                <a:latin typeface="Lucida Sans Unicode" panose="020B0602030504020204" pitchFamily="34" charset="0"/>
+                <a:cs typeface="Lucida Sans Unicode" panose="020B0602030504020204" pitchFamily="34" charset="0"/>
+              </a:rPr>
+              <a:t>*PCA reduced 15 features → </a:t>
+            </a:r>
+            <a:r>
+              <a:rPr lang="en-US" altLang="en-US" sz="8000" b="1" dirty="0">
+                <a:latin typeface="Lucida Sans Unicode" panose="020B0602030504020204" pitchFamily="34" charset="0"/>
+                <a:cs typeface="Lucida Sans Unicode" panose="020B0602030504020204" pitchFamily="34" charset="0"/>
+              </a:rPr>
+              <a:t>4 PCs</a:t>
+            </a:r>
+            <a:endParaRPr lang="en-US" sz="8000" dirty="0">
+              <a:latin typeface="Lucida Sans Unicode" panose="020B0602030504020204" pitchFamily="34" charset="0"/>
+              <a:cs typeface="Lucida Sans Unicode" panose="020B0602030504020204" pitchFamily="34" charset="0"/>
+            </a:endParaRPr>
+          </a:p>
+          <a:p>
+            <a:pPr marL="0" lvl="0" indent="0" algn="just" defTabSz="914400" eaLnBrk="0" fontAlgn="base" hangingPunct="0">
+              <a:spcBef>
+                <a:spcPct val="0"/>
+              </a:spcBef>
+              <a:spcAft>
+                <a:spcPct val="0"/>
+              </a:spcAft>
+              <a:buClrTx/>
+              <a:buSzTx/>
+              <a:buNone/>
+            </a:pPr>
+            <a:r>
+              <a:rPr lang="en-US" altLang="en-US" sz="8000" b="1" dirty="0">
+                <a:latin typeface="Lucida Sans Unicode" panose="020B0602030504020204" pitchFamily="34" charset="0"/>
+                <a:cs typeface="Lucida Sans Unicode" panose="020B0602030504020204" pitchFamily="34" charset="0"/>
+              </a:rPr>
+              <a:t>*85% of total variance retained</a:t>
+            </a:r>
+            <a:r>
+              <a:rPr lang="en-US" altLang="en-US" sz="8000" dirty="0">
+                <a:latin typeface="Lucida Sans Unicode" panose="020B0602030504020204" pitchFamily="34" charset="0"/>
+                <a:cs typeface="Lucida Sans Unicode" panose="020B0602030504020204" pitchFamily="34" charset="0"/>
+              </a:rPr>
+              <a:t> </a:t>
+            </a:r>
+          </a:p>
+          <a:p>
+            <a:pPr marL="0" lvl="0" indent="0" algn="just" defTabSz="914400" eaLnBrk="0" fontAlgn="base" hangingPunct="0">
+              <a:spcBef>
+                <a:spcPct val="0"/>
+              </a:spcBef>
+              <a:spcAft>
+                <a:spcPct val="0"/>
+              </a:spcAft>
+              <a:buClrTx/>
+              <a:buSzTx/>
+              <a:buFontTx/>
+              <a:buChar char="•"/>
+            </a:pPr>
+            <a:r>
+              <a:rPr lang="en-US" altLang="en-US" sz="8000" dirty="0">
+                <a:latin typeface="Lucida Sans Unicode" panose="020B0602030504020204" pitchFamily="34" charset="0"/>
+                <a:cs typeface="Lucida Sans Unicode" panose="020B0602030504020204" pitchFamily="34" charset="0"/>
+              </a:rPr>
+              <a:t>Scree plot shows clear “elbow” at PC4 </a:t>
+            </a:r>
+          </a:p>
+          <a:p>
+            <a:pPr marL="0" lvl="0" indent="0" algn="just" defTabSz="914400" eaLnBrk="0" fontAlgn="base" hangingPunct="0">
+              <a:spcBef>
+                <a:spcPct val="0"/>
+              </a:spcBef>
+              <a:spcAft>
+                <a:spcPct val="0"/>
+              </a:spcAft>
+              <a:buClrTx/>
+              <a:buSzTx/>
+              <a:buFontTx/>
+              <a:buChar char="•"/>
+            </a:pPr>
+            <a:r>
+              <a:rPr lang="en-US" altLang="en-US" sz="8000" dirty="0">
+                <a:latin typeface="Lucida Sans Unicode" panose="020B0602030504020204" pitchFamily="34" charset="0"/>
+                <a:cs typeface="Lucida Sans Unicode" panose="020B0602030504020204" pitchFamily="34" charset="0"/>
+              </a:rPr>
+              <a:t>PC1 &amp; PC2 capture majority of variability </a:t>
+            </a:r>
+          </a:p>
+          <a:p>
+            <a:pPr marL="0" lvl="0" indent="0" algn="just" defTabSz="914400" eaLnBrk="0" fontAlgn="base" hangingPunct="0">
+              <a:spcBef>
+                <a:spcPct val="0"/>
+              </a:spcBef>
+              <a:spcAft>
+                <a:spcPct val="0"/>
+              </a:spcAft>
+              <a:buClrTx/>
+              <a:buSzTx/>
+              <a:buFontTx/>
+              <a:buChar char="•"/>
+            </a:pPr>
+            <a:r>
+              <a:rPr lang="en-US" altLang="en-US" sz="8000" dirty="0">
+                <a:latin typeface="Lucida Sans Unicode" panose="020B0602030504020204" pitchFamily="34" charset="0"/>
+                <a:cs typeface="Lucida Sans Unicode" panose="020B0602030504020204" pitchFamily="34" charset="0"/>
+              </a:rPr>
+              <a:t>Enables 2D visualization of patient similarity </a:t>
+            </a:r>
+          </a:p>
+          <a:p>
+            <a:pPr algn="just"/>
+            <a:endParaRPr lang="en-US" sz="8000" dirty="0">
+              <a:latin typeface="Lucida Sans Unicode" panose="020B0602030504020204" pitchFamily="34" charset="0"/>
+              <a:cs typeface="Lucida Sans Unicode" panose="020B0602030504020204" pitchFamily="34" charset="0"/>
+            </a:endParaRPr>
+          </a:p>
+          <a:p>
+            <a:pPr algn="just"/>
+            <a:r>
+              <a:rPr lang="en-US" sz="8000" dirty="0">
+                <a:latin typeface="Lucida Sans Unicode" panose="020B0602030504020204" pitchFamily="34" charset="0"/>
+                <a:cs typeface="Lucida Sans Unicode" panose="020B0602030504020204" pitchFamily="34" charset="0"/>
+              </a:rPr>
+              <a:t>PC1 captures overall metabolic risk (high glucose, triglycerides, BMI), while PC2 reflects cardiovascular stress (blood pressure and age</a:t>
+            </a:r>
+          </a:p>
+          <a:p>
+            <a:pPr algn="just"/>
+            <a:r>
+              <a:rPr lang="en-US" sz="8000" dirty="0">
+                <a:latin typeface="Lucida Sans Unicode" panose="020B0602030504020204" pitchFamily="34" charset="0"/>
+                <a:cs typeface="Lucida Sans Unicode" panose="020B0602030504020204" pitchFamily="34" charset="0"/>
+              </a:rPr>
+              <a:t>All three methods—Elbow, Silhouette, and Gap Statistic—converged at k=3, indicating stable and well-separated clusters.</a:t>
+            </a:r>
+          </a:p>
+          <a:p>
+            <a:pPr algn="just"/>
+            <a:r>
+              <a:rPr lang="en-US" sz="8000" dirty="0">
+                <a:latin typeface="Lucida Sans Unicode" panose="020B0602030504020204" pitchFamily="34" charset="0"/>
+                <a:cs typeface="Lucida Sans Unicode" panose="020B0602030504020204" pitchFamily="34" charset="0"/>
+              </a:rPr>
+              <a:t>A silhouette score of 0.42 indicates moderate cluster separation, suggesting meaningful but not perfectly distinct patient groups—expected in real clinical data</a:t>
+            </a:r>
+          </a:p>
+          <a:p>
+            <a:pPr algn="just"/>
+            <a:r>
+              <a:rPr lang="en-US" sz="8000" dirty="0">
+                <a:latin typeface="Lucida Sans Unicode" panose="020B0602030504020204" pitchFamily="34" charset="0"/>
+                <a:cs typeface="Lucida Sans Unicode" panose="020B0602030504020204" pitchFamily="34" charset="0"/>
+              </a:rPr>
+              <a:t>PCA helped us reduce noise and reveal the dominant structure of cardiometabolic risk</a:t>
+            </a:r>
+          </a:p>
+          <a:p>
+            <a:pPr algn="just"/>
+            <a:r>
+              <a:rPr lang="en-US" sz="8000" dirty="0">
+                <a:latin typeface="Lucida Sans Unicode" panose="020B0602030504020204" pitchFamily="34" charset="0"/>
+                <a:cs typeface="Lucida Sans Unicode" panose="020B0602030504020204" pitchFamily="34" charset="0"/>
+              </a:rPr>
+              <a:t>K-means allowed us to uncover hidden patient phenotypes without using labels.</a:t>
+            </a:r>
+          </a:p>
+          <a:p>
+            <a:endParaRPr lang="en-US" dirty="0">
+              <a:latin typeface="Lucida Sans Unicode" panose="020B0602030504020204" pitchFamily="34" charset="0"/>
+              <a:cs typeface="Lucida Sans Unicode" panose="020B0602030504020204" pitchFamily="34" charset="0"/>
+            </a:endParaRPr>
+          </a:p>
+        </p:txBody>
+      </p:sp>
+      <p:pic>
+        <p:nvPicPr>
+          <p:cNvPr id="5" name="Picture 4">
+            <a:extLst>
+              <a:ext uri="{FF2B5EF4-FFF2-40B4-BE49-F238E27FC236}">
+                <a16:creationId xmlns:a16="http://schemas.microsoft.com/office/drawing/2014/main" id="{72BB98BA-F80B-8F01-7029-F59851774A58}"/>
+              </a:ext>
+            </a:extLst>
+          </p:cNvPr>
+          <p:cNvPicPr>
+            <a:picLocks noChangeAspect="1"/>
+          </p:cNvPicPr>
+          <p:nvPr/>
+        </p:nvPicPr>
+        <p:blipFill>
+          <a:blip r:embed="rId2"/>
+          <a:stretch>
+            <a:fillRect/>
+          </a:stretch>
+        </p:blipFill>
+        <p:spPr>
+          <a:xfrm>
+            <a:off x="394091" y="854439"/>
+            <a:ext cx="4642604" cy="5750619"/>
+          </a:xfrm>
+          <a:prstGeom prst="rect">
+            <a:avLst/>
+          </a:prstGeom>
+        </p:spPr>
+      </p:pic>
     </p:spTree>
     <p:extLst>
       <p:ext uri="{BB962C8B-B14F-4D97-AF65-F5344CB8AC3E}">
@@ -8175,44 +10662,371 @@
         <p:spPr>
           <a:xfrm>
             <a:off x="685801" y="164893"/>
-            <a:ext cx="11366291" cy="901908"/>
+            <a:ext cx="11366291" cy="539645"/>
           </a:xfrm>
         </p:spPr>
         <p:txBody>
           <a:bodyPr>
-            <a:normAutofit/>
+            <a:normAutofit fontScale="90000"/>
           </a:bodyPr>
           <a:lstStyle/>
           <a:p>
             <a:r>
               <a:rPr lang="en-US" sz="4400" cap="none" dirty="0"/>
-              <a:t>2.5 Task 5: K-means Clustering Implementation</a:t>
-            </a:r>
-          </a:p>
-        </p:txBody>
-      </p:sp>
-      <p:sp>
-        <p:nvSpPr>
-          <p:cNvPr id="3" name="Content Placeholder 2">
+              <a:t>2.5a Task 5: K-means Clustering Implementation</a:t>
+            </a:r>
+          </a:p>
+        </p:txBody>
+      </p:sp>
+      <p:pic>
+        <p:nvPicPr>
+          <p:cNvPr id="11" name="Content Placeholder 10">
             <a:extLst>
               <a:ext uri="{FF2B5EF4-FFF2-40B4-BE49-F238E27FC236}">
-                <a16:creationId xmlns:a16="http://schemas.microsoft.com/office/drawing/2014/main" id="{6020D027-5E26-46C0-5CCF-BF42104DC59E}"/>
+                <a16:creationId xmlns:a16="http://schemas.microsoft.com/office/drawing/2014/main" id="{0D475627-3DD3-A5F4-E74E-1423C96D9B20}"/>
               </a:ext>
             </a:extLst>
           </p:cNvPr>
-          <p:cNvSpPr>
-            <a:spLocks noGrp="1"/>
-          </p:cNvSpPr>
+          <p:cNvPicPr>
+            <a:picLocks noGrp="1" noChangeAspect="1"/>
+          </p:cNvPicPr>
           <p:nvPr>
             <p:ph idx="1"/>
           </p:nvPr>
-        </p:nvSpPr>
-        <p:spPr/>
-        <p:txBody>
-          <a:bodyPr/>
+        </p:nvPicPr>
+        <p:blipFill>
+          <a:blip r:embed="rId2"/>
+          <a:stretch>
+            <a:fillRect/>
+          </a:stretch>
+        </p:blipFill>
+        <p:spPr>
+          <a:xfrm>
+            <a:off x="184731" y="869430"/>
+            <a:ext cx="6321000" cy="5546359"/>
+          </a:xfrm>
+          <a:prstGeom prst="rect">
+            <a:avLst/>
+          </a:prstGeom>
+        </p:spPr>
+      </p:pic>
+      <p:sp>
+        <p:nvSpPr>
+          <p:cNvPr id="6" name="TextBox 5">
+            <a:extLst>
+              <a:ext uri="{FF2B5EF4-FFF2-40B4-BE49-F238E27FC236}">
+                <a16:creationId xmlns:a16="http://schemas.microsoft.com/office/drawing/2014/main" id="{972D7D3D-635E-6C30-95A6-28DDF796ABF2}"/>
+              </a:ext>
+            </a:extLst>
+          </p:cNvPr>
+          <p:cNvSpPr txBox="1"/>
+          <p:nvPr/>
+        </p:nvSpPr>
+        <p:spPr>
+          <a:xfrm>
+            <a:off x="6880485" y="1259174"/>
+            <a:ext cx="4901784" cy="5632311"/>
+          </a:xfrm>
+          <a:prstGeom prst="rect">
+            <a:avLst/>
+          </a:prstGeom>
+          <a:noFill/>
+        </p:spPr>
+        <p:txBody>
+          <a:bodyPr wrap="square" rtlCol="0">
+            <a:spAutoFit/>
+          </a:bodyPr>
           <a:lstStyle/>
           <a:p>
-            <a:endParaRPr lang="en-US" dirty="0"/>
+            <a:pPr lvl="0" defTabSz="914400" eaLnBrk="0" fontAlgn="base" hangingPunct="0">
+              <a:spcBef>
+                <a:spcPct val="0"/>
+              </a:spcBef>
+              <a:spcAft>
+                <a:spcPct val="0"/>
+              </a:spcAft>
+              <a:buFontTx/>
+              <a:buChar char="•"/>
+            </a:pPr>
+            <a:r>
+              <a:rPr lang="en-US" altLang="en-US" dirty="0">
+                <a:latin typeface="Arial" panose="020B0604020202020204" pitchFamily="34" charset="0"/>
+              </a:rPr>
+              <a:t>K-means applied on scaled PCA features </a:t>
+            </a:r>
+          </a:p>
+          <a:p>
+            <a:pPr lvl="0" defTabSz="914400" eaLnBrk="0" fontAlgn="base" hangingPunct="0">
+              <a:spcBef>
+                <a:spcPct val="0"/>
+              </a:spcBef>
+              <a:spcAft>
+                <a:spcPct val="0"/>
+              </a:spcAft>
+              <a:buFontTx/>
+              <a:buChar char="•"/>
+            </a:pPr>
+            <a:r>
+              <a:rPr lang="en-US" altLang="en-US" dirty="0">
+                <a:latin typeface="Arial" panose="020B0604020202020204" pitchFamily="34" charset="0"/>
+              </a:rPr>
+              <a:t>Optimal clusters determined using: </a:t>
+            </a:r>
+          </a:p>
+          <a:p>
+            <a:pPr lvl="0" defTabSz="914400" eaLnBrk="0" fontAlgn="base" hangingPunct="0">
+              <a:spcBef>
+                <a:spcPct val="0"/>
+              </a:spcBef>
+              <a:spcAft>
+                <a:spcPct val="0"/>
+              </a:spcAft>
+              <a:buFontTx/>
+              <a:buChar char="•"/>
+            </a:pPr>
+            <a:r>
+              <a:rPr lang="en-US" altLang="en-US" dirty="0">
+                <a:latin typeface="Arial" panose="020B0604020202020204" pitchFamily="34" charset="0"/>
+              </a:rPr>
+              <a:t>Elbow Method </a:t>
+            </a:r>
+          </a:p>
+          <a:p>
+            <a:pPr lvl="0" defTabSz="914400" eaLnBrk="0" fontAlgn="base" hangingPunct="0">
+              <a:spcBef>
+                <a:spcPct val="0"/>
+              </a:spcBef>
+              <a:spcAft>
+                <a:spcPct val="0"/>
+              </a:spcAft>
+              <a:buFontTx/>
+              <a:buChar char="•"/>
+            </a:pPr>
+            <a:r>
+              <a:rPr lang="en-US" altLang="en-US" dirty="0">
+                <a:latin typeface="Arial" panose="020B0604020202020204" pitchFamily="34" charset="0"/>
+              </a:rPr>
+              <a:t>Silhouette Analysis </a:t>
+            </a:r>
+          </a:p>
+          <a:p>
+            <a:pPr lvl="0" defTabSz="914400" eaLnBrk="0" fontAlgn="base" hangingPunct="0">
+              <a:spcBef>
+                <a:spcPct val="0"/>
+              </a:spcBef>
+              <a:spcAft>
+                <a:spcPct val="0"/>
+              </a:spcAft>
+              <a:buFontTx/>
+              <a:buChar char="•"/>
+            </a:pPr>
+            <a:r>
+              <a:rPr lang="en-US" altLang="en-US" dirty="0">
+                <a:latin typeface="Arial" panose="020B0604020202020204" pitchFamily="34" charset="0"/>
+              </a:rPr>
+              <a:t>Gap Statistic </a:t>
+            </a:r>
+          </a:p>
+          <a:p>
+            <a:pPr lvl="0" defTabSz="914400" eaLnBrk="0" fontAlgn="base" hangingPunct="0">
+              <a:spcBef>
+                <a:spcPct val="0"/>
+              </a:spcBef>
+              <a:spcAft>
+                <a:spcPct val="0"/>
+              </a:spcAft>
+              <a:buFontTx/>
+              <a:buChar char="•"/>
+            </a:pPr>
+            <a:r>
+              <a:rPr lang="en-US" altLang="en-US" b="1" dirty="0">
+                <a:latin typeface="Arial" panose="020B0604020202020204" pitchFamily="34" charset="0"/>
+              </a:rPr>
+              <a:t>Optimal k = 3</a:t>
+            </a:r>
+            <a:r>
+              <a:rPr lang="en-US" altLang="en-US" dirty="0">
+                <a:latin typeface="Arial" panose="020B0604020202020204" pitchFamily="34" charset="0"/>
+              </a:rPr>
+              <a:t> </a:t>
+            </a:r>
+          </a:p>
+          <a:p>
+            <a:pPr lvl="0" defTabSz="914400" eaLnBrk="0" fontAlgn="base" hangingPunct="0">
+              <a:spcBef>
+                <a:spcPct val="0"/>
+              </a:spcBef>
+              <a:spcAft>
+                <a:spcPct val="0"/>
+              </a:spcAft>
+              <a:buFontTx/>
+              <a:buChar char="•"/>
+            </a:pPr>
+            <a:r>
+              <a:rPr lang="en-US" altLang="en-US" dirty="0">
+                <a:latin typeface="Arial" panose="020B0604020202020204" pitchFamily="34" charset="0"/>
+              </a:rPr>
+              <a:t>Mean Silhouette Score: </a:t>
+            </a:r>
+            <a:r>
+              <a:rPr lang="en-US" altLang="en-US" b="1" dirty="0">
+                <a:latin typeface="Arial" panose="020B0604020202020204" pitchFamily="34" charset="0"/>
+              </a:rPr>
+              <a:t>0.42 (moderate separation)</a:t>
+            </a:r>
+          </a:p>
+          <a:p>
+            <a:pPr lvl="0" defTabSz="914400" eaLnBrk="0" fontAlgn="base" hangingPunct="0">
+              <a:spcBef>
+                <a:spcPct val="0"/>
+              </a:spcBef>
+              <a:spcAft>
+                <a:spcPct val="0"/>
+              </a:spcAft>
+              <a:buFontTx/>
+              <a:buChar char="•"/>
+            </a:pPr>
+            <a:r>
+              <a:rPr lang="en-US" altLang="en-US" dirty="0">
+                <a:latin typeface="Arial" panose="020B0604020202020204" pitchFamily="34" charset="0"/>
+              </a:rPr>
+              <a:t> </a:t>
+            </a:r>
+          </a:p>
+          <a:p>
+            <a:pPr lvl="0" defTabSz="914400" eaLnBrk="0" fontAlgn="base" hangingPunct="0">
+              <a:spcBef>
+                <a:spcPct val="0"/>
+              </a:spcBef>
+              <a:spcAft>
+                <a:spcPct val="0"/>
+              </a:spcAft>
+              <a:buFontTx/>
+              <a:buChar char="•"/>
+            </a:pPr>
+            <a:r>
+              <a:rPr lang="en-US" altLang="en-US" dirty="0">
+                <a:latin typeface="Arial" panose="020B0604020202020204" pitchFamily="34" charset="0"/>
+              </a:rPr>
+              <a:t>3 clinically meaningful clusters identified </a:t>
+            </a:r>
+          </a:p>
+          <a:p>
+            <a:pPr lvl="0" defTabSz="914400" eaLnBrk="0" fontAlgn="base" hangingPunct="0">
+              <a:spcBef>
+                <a:spcPct val="0"/>
+              </a:spcBef>
+              <a:spcAft>
+                <a:spcPct val="0"/>
+              </a:spcAft>
+              <a:buFontTx/>
+              <a:buChar char="•"/>
+            </a:pPr>
+            <a:r>
+              <a:rPr lang="en-US" altLang="en-US" b="1" dirty="0">
+                <a:latin typeface="Arial" panose="020B0604020202020204" pitchFamily="34" charset="0"/>
+              </a:rPr>
+              <a:t>Cluster 1 (Low Risk)</a:t>
+            </a:r>
+            <a:br>
+              <a:rPr lang="en-US" altLang="en-US" dirty="0">
+                <a:latin typeface="Arial" panose="020B0604020202020204" pitchFamily="34" charset="0"/>
+              </a:rPr>
+            </a:br>
+            <a:r>
+              <a:rPr lang="en-US" altLang="en-US" dirty="0">
+                <a:latin typeface="Arial" panose="020B0604020202020204" pitchFamily="34" charset="0"/>
+              </a:rPr>
+              <a:t>Younger, normal BMI, healthy lipid &amp; glucose levels </a:t>
+            </a:r>
+          </a:p>
+          <a:p>
+            <a:pPr lvl="0" defTabSz="914400" eaLnBrk="0" fontAlgn="base" hangingPunct="0">
+              <a:spcBef>
+                <a:spcPct val="0"/>
+              </a:spcBef>
+              <a:spcAft>
+                <a:spcPct val="0"/>
+              </a:spcAft>
+              <a:buFontTx/>
+              <a:buChar char="•"/>
+            </a:pPr>
+            <a:r>
+              <a:rPr lang="en-US" altLang="en-US" b="1" dirty="0">
+                <a:latin typeface="Arial" panose="020B0604020202020204" pitchFamily="34" charset="0"/>
+              </a:rPr>
+              <a:t>Cluster 2 (Metabolic Syndrome)</a:t>
+            </a:r>
+            <a:br>
+              <a:rPr lang="en-US" altLang="en-US" dirty="0">
+                <a:latin typeface="Arial" panose="020B0604020202020204" pitchFamily="34" charset="0"/>
+              </a:rPr>
+            </a:br>
+            <a:r>
+              <a:rPr lang="en-US" altLang="en-US" dirty="0">
+                <a:latin typeface="Arial" panose="020B0604020202020204" pitchFamily="34" charset="0"/>
+              </a:rPr>
+              <a:t>High waist, triglycerides, fasting glucose </a:t>
+            </a:r>
+          </a:p>
+          <a:p>
+            <a:pPr lvl="0" defTabSz="914400" eaLnBrk="0" fontAlgn="base" hangingPunct="0">
+              <a:spcBef>
+                <a:spcPct val="0"/>
+              </a:spcBef>
+              <a:spcAft>
+                <a:spcPct val="0"/>
+              </a:spcAft>
+              <a:buFontTx/>
+              <a:buChar char="•"/>
+            </a:pPr>
+            <a:r>
+              <a:rPr lang="en-US" altLang="en-US" b="1" dirty="0">
+                <a:latin typeface="Arial" panose="020B0604020202020204" pitchFamily="34" charset="0"/>
+              </a:rPr>
+              <a:t>Cluster 3 (High Cardiovascular Risk)</a:t>
+            </a:r>
+            <a:br>
+              <a:rPr lang="en-US" altLang="en-US" dirty="0">
+                <a:latin typeface="Arial" panose="020B0604020202020204" pitchFamily="34" charset="0"/>
+              </a:rPr>
+            </a:br>
+            <a:r>
+              <a:rPr lang="en-US" altLang="en-US" dirty="0">
+                <a:latin typeface="Arial" panose="020B0604020202020204" pitchFamily="34" charset="0"/>
+              </a:rPr>
+              <a:t>Older age, hypertension, high LDL, elevated CRP </a:t>
+            </a:r>
+          </a:p>
+          <a:p>
+            <a:pPr lvl="0" defTabSz="914400" eaLnBrk="0" fontAlgn="base" hangingPunct="0">
+              <a:spcBef>
+                <a:spcPct val="0"/>
+              </a:spcBef>
+              <a:spcAft>
+                <a:spcPct val="0"/>
+              </a:spcAft>
+              <a:buFontTx/>
+              <a:buChar char="•"/>
+            </a:pPr>
+            <a:endParaRPr lang="en-US" altLang="en-US" dirty="0">
+              <a:latin typeface="Arial" panose="020B0604020202020204" pitchFamily="34" charset="0"/>
+            </a:endParaRPr>
+          </a:p>
+          <a:p>
+            <a:pPr lvl="0" defTabSz="914400" eaLnBrk="0" fontAlgn="base" hangingPunct="0">
+              <a:spcBef>
+                <a:spcPct val="0"/>
+              </a:spcBef>
+              <a:spcAft>
+                <a:spcPct val="0"/>
+              </a:spcAft>
+              <a:buFontTx/>
+              <a:buChar char="•"/>
+            </a:pPr>
+            <a:endParaRPr lang="en-US" altLang="en-US" dirty="0">
+              <a:latin typeface="Arial" panose="020B0604020202020204" pitchFamily="34" charset="0"/>
+            </a:endParaRPr>
           </a:p>
         </p:txBody>
       </p:sp>
@@ -8251,7 +11065,7 @@
           <p:cNvPr id="2" name="Title 1">
             <a:extLst>
               <a:ext uri="{FF2B5EF4-FFF2-40B4-BE49-F238E27FC236}">
-                <a16:creationId xmlns:a16="http://schemas.microsoft.com/office/drawing/2014/main" id="{69A7B1B4-18BE-1E3F-5389-99B4C9900703}"/>
+                <a16:creationId xmlns:a16="http://schemas.microsoft.com/office/drawing/2014/main" id="{57AAA981-1330-BFE4-8737-EA73F44BC3A1}"/>
               </a:ext>
             </a:extLst>
           </p:cNvPr>
@@ -8264,21 +11078,22 @@
         </p:nvSpPr>
         <p:spPr>
           <a:xfrm>
-            <a:off x="685801" y="149903"/>
-            <a:ext cx="10131425" cy="554636"/>
+            <a:off x="685801" y="224852"/>
+            <a:ext cx="10131425" cy="569627"/>
           </a:xfrm>
         </p:spPr>
         <p:txBody>
           <a:bodyPr>
-            <a:noAutofit/>
+            <a:normAutofit fontScale="90000"/>
           </a:bodyPr>
           <a:lstStyle/>
           <a:p>
             <a:pPr algn="ctr"/>
             <a:r>
-              <a:rPr lang="en-US" sz="4400" cap="none" dirty="0"/>
-              <a:t>2.6 Task 6: Reproducible Reporting</a:t>
-            </a:r>
+              <a:rPr lang="en-US" b="1" cap="none" dirty="0"/>
+              <a:t>2.5b Task 5: Implementation</a:t>
+            </a:r>
+            <a:endParaRPr lang="en-US" b="1" dirty="0"/>
           </a:p>
         </p:txBody>
       </p:sp>
@@ -8287,7 +11102,7 @@
           <p:cNvPr id="3" name="Content Placeholder 2">
             <a:extLst>
               <a:ext uri="{FF2B5EF4-FFF2-40B4-BE49-F238E27FC236}">
-                <a16:creationId xmlns:a16="http://schemas.microsoft.com/office/drawing/2014/main" id="{B5E32058-47B8-BE58-80CA-35FACC82FBA2}"/>
+                <a16:creationId xmlns:a16="http://schemas.microsoft.com/office/drawing/2014/main" id="{C0DE831D-4E2E-8EBF-2ED1-737065AAA4F5}"/>
               </a:ext>
             </a:extLst>
           </p:cNvPr>
@@ -8298,19 +11113,77 @@
             <p:ph idx="1"/>
           </p:nvPr>
         </p:nvSpPr>
-        <p:spPr/>
-        <p:txBody>
-          <a:bodyPr/>
+        <p:spPr>
+          <a:xfrm>
+            <a:off x="685801" y="959371"/>
+            <a:ext cx="10856625" cy="5381468"/>
+          </a:xfrm>
+        </p:spPr>
+        <p:txBody>
+          <a:bodyPr>
+            <a:normAutofit/>
+          </a:bodyPr>
           <a:lstStyle/>
           <a:p>
-            <a:endParaRPr lang="en-US"/>
+            <a:r>
+              <a:rPr lang="en-US" sz="2000" dirty="0">
+                <a:latin typeface="Lucida Sans Unicode" panose="020B0602030504020204" pitchFamily="34" charset="0"/>
+                <a:cs typeface="Lucida Sans Unicode" panose="020B0602030504020204" pitchFamily="34" charset="0"/>
+              </a:rPr>
+              <a:t>K-means groups patients into clusters by minimizing the distance between individuals and their cluster centroids.</a:t>
+            </a:r>
+          </a:p>
+          <a:p>
+            <a:r>
+              <a:rPr lang="en-US" sz="2000" dirty="0">
+                <a:latin typeface="Lucida Sans Unicode" panose="020B0602030504020204" pitchFamily="34" charset="0"/>
+                <a:cs typeface="Lucida Sans Unicode" panose="020B0602030504020204" pitchFamily="34" charset="0"/>
+              </a:rPr>
+              <a:t>The elbow plot shows diminishing returns after k = 3, and both silhouette and gap statistic confirm that 3 clusters provide the best balance between cohesion and separation.</a:t>
+            </a:r>
+          </a:p>
+          <a:p>
+            <a:r>
+              <a:rPr lang="en-US" sz="2000" dirty="0">
+                <a:latin typeface="Lucida Sans Unicode" panose="020B0602030504020204" pitchFamily="34" charset="0"/>
+                <a:cs typeface="Lucida Sans Unicode" panose="020B0602030504020204" pitchFamily="34" charset="0"/>
+              </a:rPr>
+              <a:t>A silhouette score of 0.42 indicates moderate separation, which is expected in real-world clinical data where patient profiles often overlap.</a:t>
+            </a:r>
+          </a:p>
+          <a:p>
+            <a:r>
+              <a:rPr lang="en-US" sz="2000" dirty="0">
+                <a:latin typeface="Lucida Sans Unicode" panose="020B0602030504020204" pitchFamily="34" charset="0"/>
+                <a:cs typeface="Lucida Sans Unicode" panose="020B0602030504020204" pitchFamily="34" charset="0"/>
+              </a:rPr>
+              <a:t>The PCA scatter plot shows clear grouping of patients into three clusters, validating the clustering structure.</a:t>
+            </a:r>
+          </a:p>
+          <a:p>
+            <a:r>
+              <a:rPr lang="en-US" sz="2000" dirty="0">
+                <a:latin typeface="Lucida Sans Unicode" panose="020B0602030504020204" pitchFamily="34" charset="0"/>
+                <a:cs typeface="Lucida Sans Unicode" panose="020B0602030504020204" pitchFamily="34" charset="0"/>
+              </a:rPr>
+              <a:t>These clusters correspond to clinically meaningful groups, from low-risk individuals to high cardiovascular risk patients, demonstrating the usefulness of unsupervised learning in healthcare</a:t>
+            </a:r>
+          </a:p>
+          <a:p>
+            <a:r>
+              <a:rPr lang="en-US" sz="2000" dirty="0">
+                <a:latin typeface="Lucida Sans Unicode" panose="020B0602030504020204" pitchFamily="34" charset="0"/>
+                <a:cs typeface="Lucida Sans Unicode" panose="020B0602030504020204" pitchFamily="34" charset="0"/>
+              </a:rPr>
+              <a:t>K-means assumes spherical clusters and equal variance, which may not fully capture complex biological patterns.</a:t>
+            </a:r>
           </a:p>
         </p:txBody>
       </p:sp>
     </p:spTree>
     <p:extLst>
       <p:ext uri="{BB962C8B-B14F-4D97-AF65-F5344CB8AC3E}">
-        <p14:creationId xmlns:p14="http://schemas.microsoft.com/office/powerpoint/2010/main" val="3223621411"/>
+        <p14:creationId xmlns:p14="http://schemas.microsoft.com/office/powerpoint/2010/main" val="131686162"/>
       </p:ext>
     </p:extLst>
   </p:cSld>
